--- a/examples/recreations/23_Dropbox_Soccer__SoccerAward/out_mat2ppt.pptx
+++ b/examples/recreations/23_Dropbox_Soccer__SoccerAward/out_mat2ppt.pptx
@@ -3088,9 +3088,33 @@
         <p:nvPr/>
       </p:nvGrpSpPr>
       <p:grpSpPr/>
-      <p:sp>
-        <p:nvSpPr>
-          <p:cNvPr id="2" name="Rectangle 1"/>
+      <p:pic>
+        <p:nvPicPr>
+          <p:cNvPr id="2" name="Picture 1" descr="image1.jpeg"/>
+          <p:cNvPicPr>
+            <a:picLocks noChangeAspect="1"/>
+          </p:cNvPicPr>
+          <p:nvPr/>
+        </p:nvPicPr>
+        <p:blipFill>
+          <a:blip r:embed="rId2"/>
+          <a:stretch>
+            <a:fillRect/>
+          </a:stretch>
+        </p:blipFill>
+        <p:spPr>
+          <a:xfrm>
+            <a:off x="457200" y="342900"/>
+            <a:ext cx="9220200" cy="7124700"/>
+          </a:xfrm>
+          <a:prstGeom prst="rect">
+            <a:avLst/>
+          </a:prstGeom>
+        </p:spPr>
+      </p:pic>
+      <p:sp>
+        <p:nvSpPr>
+          <p:cNvPr id="3" name="Rectangle 2"/>
           <p:cNvSpPr/>
           <p:nvPr/>
         </p:nvSpPr>
@@ -3127,7 +3151,7 @@
       </p:sp>
       <p:sp>
         <p:nvSpPr>
-          <p:cNvPr id="3" name="Rectangle 2"/>
+          <p:cNvPr id="4" name="Rectangle 3"/>
           <p:cNvSpPr/>
           <p:nvPr/>
         </p:nvSpPr>

--- a/examples/recreations/23_Dropbox_Soccer__SoccerAward/out_mat2ppt.pptx
+++ b/examples/recreations/23_Dropbox_Soccer__SoccerAward/out_mat2ppt.pptx
@@ -1,70 +1,534 @@
 
 <file path=ppt/presentation.xml><?xml version="1.0" encoding="utf-8"?>
-<p:presentation xmlns:a="http://schemas.openxmlformats.org/drawingml/2006/main" xmlns:r="http://schemas.openxmlformats.org/officeDocument/2006/relationships" xmlns:p="http://schemas.openxmlformats.org/presentationml/2006/main" saveSubsetFonts="1" autoCompressPictures="0">
+<p:presentation xmlns:a="http://schemas.openxmlformats.org/drawingml/2006/main" xmlns:r="http://schemas.openxmlformats.org/officeDocument/2006/relationships" xmlns:p="http://schemas.openxmlformats.org/presentationml/2006/main" saveSubsetFonts="1">
   <p:sldMasterIdLst>
     <p:sldMasterId id="2147483648" r:id="rId1"/>
   </p:sldMasterIdLst>
+  <p:notesMasterIdLst>
+    <p:notesMasterId r:id="rId3"/>
+  </p:notesMasterIdLst>
   <p:sldIdLst>
-    <p:sldId id="256" r:id="rId7"/>
+    <p:sldId id="256" r:id="rId8"/>
   </p:sldIdLst>
-  <p:sldSz cx="10058400" cy="7772400" type="screen4x3"/>
+  <p:sldSz cx="10058400" cy="7772400"/>
   <p:notesSz cx="6858000" cy="9144000"/>
   <p:defaultTextStyle>
     <a:defPPr>
       <a:defRPr lang="en-US"/>
     </a:defPPr>
-    <a:lvl1pPr marL="0" algn="l" defTabSz="457200" rtl="0" eaLnBrk="1" latinLnBrk="0" hangingPunct="1">
-      <a:defRPr sz="1800" kern="1200">
+    <a:lvl1pPr algn="l" rtl="0" fontAlgn="base">
+      <a:spcBef>
+        <a:spcPct val="0"/>
+      </a:spcBef>
+      <a:spcAft>
+        <a:spcPct val="0"/>
+      </a:spcAft>
+      <a:defRPr sz="2000" kern="1200">
         <a:solidFill>
           <a:schemeClr val="tx1"/>
         </a:solidFill>
-        <a:latin typeface="+mn-lt"/>
+        <a:latin typeface="Arial" charset="0"/>
         <a:ea typeface="+mn-ea"/>
         <a:cs typeface="+mn-cs"/>
       </a:defRPr>
     </a:lvl1pPr>
-    <a:lvl2pPr marL="457200" algn="l" defTabSz="457200" rtl="0" eaLnBrk="1" latinLnBrk="0" hangingPunct="1">
-      <a:defRPr sz="1800" kern="1200">
+    <a:lvl2pPr marL="457200" algn="l" rtl="0" fontAlgn="base">
+      <a:spcBef>
+        <a:spcPct val="0"/>
+      </a:spcBef>
+      <a:spcAft>
+        <a:spcPct val="0"/>
+      </a:spcAft>
+      <a:defRPr sz="2000" kern="1200">
         <a:solidFill>
           <a:schemeClr val="tx1"/>
         </a:solidFill>
-        <a:latin typeface="+mn-lt"/>
+        <a:latin typeface="Arial" charset="0"/>
         <a:ea typeface="+mn-ea"/>
         <a:cs typeface="+mn-cs"/>
       </a:defRPr>
     </a:lvl2pPr>
-    <a:lvl3pPr marL="914400" algn="l" defTabSz="457200" rtl="0" eaLnBrk="1" latinLnBrk="0" hangingPunct="1">
-      <a:defRPr sz="1800" kern="1200">
+    <a:lvl3pPr marL="914400" algn="l" rtl="0" fontAlgn="base">
+      <a:spcBef>
+        <a:spcPct val="0"/>
+      </a:spcBef>
+      <a:spcAft>
+        <a:spcPct val="0"/>
+      </a:spcAft>
+      <a:defRPr sz="2000" kern="1200">
         <a:solidFill>
           <a:schemeClr val="tx1"/>
         </a:solidFill>
-        <a:latin typeface="+mn-lt"/>
+        <a:latin typeface="Arial" charset="0"/>
         <a:ea typeface="+mn-ea"/>
         <a:cs typeface="+mn-cs"/>
       </a:defRPr>
     </a:lvl3pPr>
-    <a:lvl4pPr marL="1371600" algn="l" defTabSz="457200" rtl="0" eaLnBrk="1" latinLnBrk="0" hangingPunct="1">
-      <a:defRPr sz="1800" kern="1200">
+    <a:lvl4pPr marL="1371600" algn="l" rtl="0" fontAlgn="base">
+      <a:spcBef>
+        <a:spcPct val="0"/>
+      </a:spcBef>
+      <a:spcAft>
+        <a:spcPct val="0"/>
+      </a:spcAft>
+      <a:defRPr sz="2000" kern="1200">
         <a:solidFill>
           <a:schemeClr val="tx1"/>
         </a:solidFill>
-        <a:latin typeface="+mn-lt"/>
+        <a:latin typeface="Arial" charset="0"/>
         <a:ea typeface="+mn-ea"/>
         <a:cs typeface="+mn-cs"/>
       </a:defRPr>
     </a:lvl4pPr>
-    <a:lvl5pPr marL="1828800" algn="l" defTabSz="457200" rtl="0" eaLnBrk="1" latinLnBrk="0" hangingPunct="1">
-      <a:defRPr sz="1800" kern="1200">
+    <a:lvl5pPr marL="1828800" algn="l" rtl="0" fontAlgn="base">
+      <a:spcBef>
+        <a:spcPct val="0"/>
+      </a:spcBef>
+      <a:spcAft>
+        <a:spcPct val="0"/>
+      </a:spcAft>
+      <a:defRPr sz="2000" kern="1200">
         <a:solidFill>
           <a:schemeClr val="tx1"/>
         </a:solidFill>
-        <a:latin typeface="+mn-lt"/>
+        <a:latin typeface="Arial" charset="0"/>
         <a:ea typeface="+mn-ea"/>
         <a:cs typeface="+mn-cs"/>
       </a:defRPr>
     </a:lvl5pPr>
-    <a:lvl6pPr marL="2286000" algn="l" defTabSz="457200" rtl="0" eaLnBrk="1" latinLnBrk="0" hangingPunct="1">
-      <a:defRPr sz="1800" kern="1200">
+    <a:lvl6pPr marL="2286000" algn="l" defTabSz="914400" rtl="0" eaLnBrk="1" latinLnBrk="0" hangingPunct="1">
+      <a:defRPr sz="2000" kern="1200">
+        <a:solidFill>
+          <a:schemeClr val="tx1"/>
+        </a:solidFill>
+        <a:latin typeface="Arial" charset="0"/>
+        <a:ea typeface="+mn-ea"/>
+        <a:cs typeface="+mn-cs"/>
+      </a:defRPr>
+    </a:lvl6pPr>
+    <a:lvl7pPr marL="2743200" algn="l" defTabSz="914400" rtl="0" eaLnBrk="1" latinLnBrk="0" hangingPunct="1">
+      <a:defRPr sz="2000" kern="1200">
+        <a:solidFill>
+          <a:schemeClr val="tx1"/>
+        </a:solidFill>
+        <a:latin typeface="Arial" charset="0"/>
+        <a:ea typeface="+mn-ea"/>
+        <a:cs typeface="+mn-cs"/>
+      </a:defRPr>
+    </a:lvl7pPr>
+    <a:lvl8pPr marL="3200400" algn="l" defTabSz="914400" rtl="0" eaLnBrk="1" latinLnBrk="0" hangingPunct="1">
+      <a:defRPr sz="2000" kern="1200">
+        <a:solidFill>
+          <a:schemeClr val="tx1"/>
+        </a:solidFill>
+        <a:latin typeface="Arial" charset="0"/>
+        <a:ea typeface="+mn-ea"/>
+        <a:cs typeface="+mn-cs"/>
+      </a:defRPr>
+    </a:lvl8pPr>
+    <a:lvl9pPr marL="3657600" algn="l" defTabSz="914400" rtl="0" eaLnBrk="1" latinLnBrk="0" hangingPunct="1">
+      <a:defRPr sz="2000" kern="1200">
+        <a:solidFill>
+          <a:schemeClr val="tx1"/>
+        </a:solidFill>
+        <a:latin typeface="Arial" charset="0"/>
+        <a:ea typeface="+mn-ea"/>
+        <a:cs typeface="+mn-cs"/>
+      </a:defRPr>
+    </a:lvl9pPr>
+  </p:defaultTextStyle>
+</p:presentation>
+</file>
+
+<file path=ppt/notesMasters/notesMaster1.xml><?xml version="1.0" encoding="utf-8"?>
+<p:notesMaster xmlns:a="http://schemas.openxmlformats.org/drawingml/2006/main" xmlns:r="http://schemas.openxmlformats.org/officeDocument/2006/relationships" xmlns:p="http://schemas.openxmlformats.org/presentationml/2006/main">
+  <p:cSld>
+    <p:bg>
+      <p:bgPr>
+        <a:solidFill>
+          <a:schemeClr val="bg1"/>
+        </a:solidFill>
+        <a:effectLst/>
+      </p:bgPr>
+    </p:bg>
+    <p:spTree>
+      <p:nvGrpSpPr>
+        <p:cNvPr id="1" name=""/>
+        <p:cNvGrpSpPr/>
+        <p:nvPr/>
+      </p:nvGrpSpPr>
+      <p:grpSpPr>
+        <a:xfrm>
+          <a:off x="0" y="0"/>
+          <a:ext cx="0" cy="0"/>
+          <a:chOff x="0" y="0"/>
+          <a:chExt cx="0" cy="0"/>
+        </a:xfrm>
+      </p:grpSpPr>
+      <p:sp>
+        <p:nvSpPr>
+          <p:cNvPr id="3074" name="Rectangle 2"/>
+          <p:cNvSpPr>
+            <a:spLocks noGrp="1" noChangeArrowheads="1"/>
+          </p:cNvSpPr>
+          <p:nvPr>
+            <p:ph type="hdr" sz="quarter"/>
+          </p:nvPr>
+        </p:nvSpPr>
+        <p:spPr bwMode="auto">
+          <a:xfrm>
+            <a:off x="0" y="0"/>
+            <a:ext cx="2971800" cy="457200"/>
+          </a:xfrm>
+          <a:prstGeom prst="rect">
+            <a:avLst/>
+          </a:prstGeom>
+          <a:noFill/>
+          <a:ln w="9525">
+            <a:noFill/>
+            <a:miter lim="800000"/>
+            <a:headEnd/>
+            <a:tailEnd/>
+          </a:ln>
+          <a:effectLst/>
+        </p:spPr>
+        <p:txBody>
+          <a:bodyPr vert="horz" wrap="square" lIns="91440" tIns="45720" rIns="91440" bIns="45720" numCol="1" anchor="t" anchorCtr="0" compatLnSpc="1">
+            <a:prstTxWarp prst="textNoShape">
+              <a:avLst/>
+            </a:prstTxWarp>
+          </a:bodyPr>
+          <a:lstStyle>
+            <a:lvl1pPr>
+              <a:defRPr sz="1200"/>
+            </a:lvl1pPr>
+          </a:lstStyle>
+          <a:p>
+            <a:endParaRPr lang="en-US"/>
+          </a:p>
+        </p:txBody>
+      </p:sp>
+      <p:sp>
+        <p:nvSpPr>
+          <p:cNvPr id="3075" name="Rectangle 3"/>
+          <p:cNvSpPr>
+            <a:spLocks noGrp="1" noChangeArrowheads="1"/>
+          </p:cNvSpPr>
+          <p:nvPr>
+            <p:ph type="dt" idx="1"/>
+          </p:nvPr>
+        </p:nvSpPr>
+        <p:spPr bwMode="auto">
+          <a:xfrm>
+            <a:off x="3884613" y="0"/>
+            <a:ext cx="2971800" cy="457200"/>
+          </a:xfrm>
+          <a:prstGeom prst="rect">
+            <a:avLst/>
+          </a:prstGeom>
+          <a:noFill/>
+          <a:ln w="9525">
+            <a:noFill/>
+            <a:miter lim="800000"/>
+            <a:headEnd/>
+            <a:tailEnd/>
+          </a:ln>
+          <a:effectLst/>
+        </p:spPr>
+        <p:txBody>
+          <a:bodyPr vert="horz" wrap="square" lIns="91440" tIns="45720" rIns="91440" bIns="45720" numCol="1" anchor="t" anchorCtr="0" compatLnSpc="1">
+            <a:prstTxWarp prst="textNoShape">
+              <a:avLst/>
+            </a:prstTxWarp>
+          </a:bodyPr>
+          <a:lstStyle>
+            <a:lvl1pPr algn="r">
+              <a:defRPr sz="1200"/>
+            </a:lvl1pPr>
+          </a:lstStyle>
+          <a:p>
+            <a:endParaRPr lang="en-US"/>
+          </a:p>
+        </p:txBody>
+      </p:sp>
+      <p:sp>
+        <p:nvSpPr>
+          <p:cNvPr id="3076" name="Rectangle 4"/>
+          <p:cNvSpPr>
+            <a:spLocks noRot="1" noChangeArrowheads="1" noTextEdit="1"/>
+          </p:cNvSpPr>
+          <p:nvPr>
+            <p:ph type="sldImg" idx="2"/>
+          </p:nvPr>
+        </p:nvSpPr>
+        <p:spPr bwMode="auto">
+          <a:xfrm>
+            <a:off x="1209675" y="685800"/>
+            <a:ext cx="4438650" cy="3429000"/>
+          </a:xfrm>
+          <a:prstGeom prst="rect">
+            <a:avLst/>
+          </a:prstGeom>
+          <a:noFill/>
+          <a:ln w="9525">
+            <a:solidFill>
+              <a:srgbClr val="000000"/>
+            </a:solidFill>
+            <a:miter lim="800000"/>
+            <a:headEnd/>
+            <a:tailEnd/>
+          </a:ln>
+          <a:effectLst/>
+        </p:spPr>
+      </p:sp>
+      <p:sp>
+        <p:nvSpPr>
+          <p:cNvPr id="3077" name="Rectangle 5"/>
+          <p:cNvSpPr>
+            <a:spLocks noGrp="1" noChangeArrowheads="1"/>
+          </p:cNvSpPr>
+          <p:nvPr>
+            <p:ph type="body" sz="quarter" idx="3"/>
+          </p:nvPr>
+        </p:nvSpPr>
+        <p:spPr bwMode="auto">
+          <a:xfrm>
+            <a:off x="685800" y="4343400"/>
+            <a:ext cx="5486400" cy="4114800"/>
+          </a:xfrm>
+          <a:prstGeom prst="rect">
+            <a:avLst/>
+          </a:prstGeom>
+          <a:noFill/>
+          <a:ln w="9525">
+            <a:noFill/>
+            <a:miter lim="800000"/>
+            <a:headEnd/>
+            <a:tailEnd/>
+          </a:ln>
+          <a:effectLst/>
+        </p:spPr>
+        <p:txBody>
+          <a:bodyPr vert="horz" wrap="square" lIns="91440" tIns="45720" rIns="91440" bIns="45720" numCol="1" anchor="t" anchorCtr="0" compatLnSpc="1">
+            <a:prstTxWarp prst="textNoShape">
+              <a:avLst/>
+            </a:prstTxWarp>
+          </a:bodyPr>
+          <a:lstStyle/>
+          <a:p>
+            <a:pPr lvl="0"/>
+            <a:r>
+              <a:rPr lang="en-US" smtClean="0"/>
+              <a:t>Click to edit Master text styles</a:t>
+            </a:r>
+          </a:p>
+          <a:p>
+            <a:pPr lvl="1"/>
+            <a:r>
+              <a:rPr lang="en-US" smtClean="0"/>
+              <a:t>Second level</a:t>
+            </a:r>
+          </a:p>
+          <a:p>
+            <a:pPr lvl="2"/>
+            <a:r>
+              <a:rPr lang="en-US" smtClean="0"/>
+              <a:t>Third level</a:t>
+            </a:r>
+          </a:p>
+          <a:p>
+            <a:pPr lvl="3"/>
+            <a:r>
+              <a:rPr lang="en-US" smtClean="0"/>
+              <a:t>Fourth level</a:t>
+            </a:r>
+          </a:p>
+          <a:p>
+            <a:pPr lvl="4"/>
+            <a:r>
+              <a:rPr lang="en-US" smtClean="0"/>
+              <a:t>Fifth level</a:t>
+            </a:r>
+          </a:p>
+        </p:txBody>
+      </p:sp>
+      <p:sp>
+        <p:nvSpPr>
+          <p:cNvPr id="3078" name="Rectangle 6"/>
+          <p:cNvSpPr>
+            <a:spLocks noGrp="1" noChangeArrowheads="1"/>
+          </p:cNvSpPr>
+          <p:nvPr>
+            <p:ph type="ftr" sz="quarter" idx="4"/>
+          </p:nvPr>
+        </p:nvSpPr>
+        <p:spPr bwMode="auto">
+          <a:xfrm>
+            <a:off x="0" y="8685213"/>
+            <a:ext cx="2971800" cy="457200"/>
+          </a:xfrm>
+          <a:prstGeom prst="rect">
+            <a:avLst/>
+          </a:prstGeom>
+          <a:noFill/>
+          <a:ln w="9525">
+            <a:noFill/>
+            <a:miter lim="800000"/>
+            <a:headEnd/>
+            <a:tailEnd/>
+          </a:ln>
+          <a:effectLst/>
+        </p:spPr>
+        <p:txBody>
+          <a:bodyPr vert="horz" wrap="square" lIns="91440" tIns="45720" rIns="91440" bIns="45720" numCol="1" anchor="b" anchorCtr="0" compatLnSpc="1">
+            <a:prstTxWarp prst="textNoShape">
+              <a:avLst/>
+            </a:prstTxWarp>
+          </a:bodyPr>
+          <a:lstStyle>
+            <a:lvl1pPr>
+              <a:defRPr sz="1200"/>
+            </a:lvl1pPr>
+          </a:lstStyle>
+          <a:p>
+            <a:endParaRPr lang="en-US"/>
+          </a:p>
+        </p:txBody>
+      </p:sp>
+      <p:sp>
+        <p:nvSpPr>
+          <p:cNvPr id="3079" name="Rectangle 7"/>
+          <p:cNvSpPr>
+            <a:spLocks noGrp="1" noChangeArrowheads="1"/>
+          </p:cNvSpPr>
+          <p:nvPr>
+            <p:ph type="sldNum" sz="quarter" idx="5"/>
+          </p:nvPr>
+        </p:nvSpPr>
+        <p:spPr bwMode="auto">
+          <a:xfrm>
+            <a:off x="3884613" y="8685213"/>
+            <a:ext cx="2971800" cy="457200"/>
+          </a:xfrm>
+          <a:prstGeom prst="rect">
+            <a:avLst/>
+          </a:prstGeom>
+          <a:noFill/>
+          <a:ln w="9525">
+            <a:noFill/>
+            <a:miter lim="800000"/>
+            <a:headEnd/>
+            <a:tailEnd/>
+          </a:ln>
+          <a:effectLst/>
+        </p:spPr>
+        <p:txBody>
+          <a:bodyPr vert="horz" wrap="square" lIns="91440" tIns="45720" rIns="91440" bIns="45720" numCol="1" anchor="b" anchorCtr="0" compatLnSpc="1">
+            <a:prstTxWarp prst="textNoShape">
+              <a:avLst/>
+            </a:prstTxWarp>
+          </a:bodyPr>
+          <a:lstStyle>
+            <a:lvl1pPr algn="r">
+              <a:defRPr sz="1200"/>
+            </a:lvl1pPr>
+          </a:lstStyle>
+          <a:p>
+            <a:fld id="{28115441-EE0F-4D96-8FA3-F5057983E246}" type="slidenum">
+              <a:rPr lang="en-US"/>
+              <a:pPr/>
+              <a:t>‹#›</a:t>
+            </a:fld>
+            <a:endParaRPr lang="en-US"/>
+          </a:p>
+        </p:txBody>
+      </p:sp>
+    </p:spTree>
+  </p:cSld>
+  <p:clrMap bg1="lt1" tx1="dk1" bg2="lt2" tx2="dk2" accent1="accent1" accent2="accent2" accent3="accent3" accent4="accent4" accent5="accent5" accent6="accent6" hlink="hlink" folHlink="folHlink"/>
+  <p:notesStyle>
+    <a:lvl1pPr algn="l" rtl="0" fontAlgn="base">
+      <a:spcBef>
+        <a:spcPct val="30000"/>
+      </a:spcBef>
+      <a:spcAft>
+        <a:spcPct val="0"/>
+      </a:spcAft>
+      <a:defRPr sz="1200" kern="1200">
+        <a:solidFill>
+          <a:schemeClr val="tx1"/>
+        </a:solidFill>
+        <a:latin typeface="Arial" charset="0"/>
+        <a:ea typeface="+mn-ea"/>
+        <a:cs typeface="+mn-cs"/>
+      </a:defRPr>
+    </a:lvl1pPr>
+    <a:lvl2pPr marL="457200" algn="l" rtl="0" fontAlgn="base">
+      <a:spcBef>
+        <a:spcPct val="30000"/>
+      </a:spcBef>
+      <a:spcAft>
+        <a:spcPct val="0"/>
+      </a:spcAft>
+      <a:defRPr sz="1200" kern="1200">
+        <a:solidFill>
+          <a:schemeClr val="tx1"/>
+        </a:solidFill>
+        <a:latin typeface="Arial" charset="0"/>
+        <a:ea typeface="+mn-ea"/>
+        <a:cs typeface="+mn-cs"/>
+      </a:defRPr>
+    </a:lvl2pPr>
+    <a:lvl3pPr marL="914400" algn="l" rtl="0" fontAlgn="base">
+      <a:spcBef>
+        <a:spcPct val="30000"/>
+      </a:spcBef>
+      <a:spcAft>
+        <a:spcPct val="0"/>
+      </a:spcAft>
+      <a:defRPr sz="1200" kern="1200">
+        <a:solidFill>
+          <a:schemeClr val="tx1"/>
+        </a:solidFill>
+        <a:latin typeface="Arial" charset="0"/>
+        <a:ea typeface="+mn-ea"/>
+        <a:cs typeface="+mn-cs"/>
+      </a:defRPr>
+    </a:lvl3pPr>
+    <a:lvl4pPr marL="1371600" algn="l" rtl="0" fontAlgn="base">
+      <a:spcBef>
+        <a:spcPct val="30000"/>
+      </a:spcBef>
+      <a:spcAft>
+        <a:spcPct val="0"/>
+      </a:spcAft>
+      <a:defRPr sz="1200" kern="1200">
+        <a:solidFill>
+          <a:schemeClr val="tx1"/>
+        </a:solidFill>
+        <a:latin typeface="Arial" charset="0"/>
+        <a:ea typeface="+mn-ea"/>
+        <a:cs typeface="+mn-cs"/>
+      </a:defRPr>
+    </a:lvl4pPr>
+    <a:lvl5pPr marL="1828800" algn="l" rtl="0" fontAlgn="base">
+      <a:spcBef>
+        <a:spcPct val="30000"/>
+      </a:spcBef>
+      <a:spcAft>
+        <a:spcPct val="0"/>
+      </a:spcAft>
+      <a:defRPr sz="1200" kern="1200">
+        <a:solidFill>
+          <a:schemeClr val="tx1"/>
+        </a:solidFill>
+        <a:latin typeface="Arial" charset="0"/>
+        <a:ea typeface="+mn-ea"/>
+        <a:cs typeface="+mn-cs"/>
+      </a:defRPr>
+    </a:lvl5pPr>
+    <a:lvl6pPr marL="2286000" algn="l" defTabSz="914400" rtl="0" eaLnBrk="1" latinLnBrk="0" hangingPunct="1">
+      <a:defRPr sz="1200" kern="1200">
         <a:solidFill>
           <a:schemeClr val="tx1"/>
         </a:solidFill>
@@ -73,8 +537,8 @@
         <a:cs typeface="+mn-cs"/>
       </a:defRPr>
     </a:lvl6pPr>
-    <a:lvl7pPr marL="2743200" algn="l" defTabSz="457200" rtl="0" eaLnBrk="1" latinLnBrk="0" hangingPunct="1">
-      <a:defRPr sz="1800" kern="1200">
+    <a:lvl7pPr marL="2743200" algn="l" defTabSz="914400" rtl="0" eaLnBrk="1" latinLnBrk="0" hangingPunct="1">
+      <a:defRPr sz="1200" kern="1200">
         <a:solidFill>
           <a:schemeClr val="tx1"/>
         </a:solidFill>
@@ -83,8 +547,8 @@
         <a:cs typeface="+mn-cs"/>
       </a:defRPr>
     </a:lvl7pPr>
-    <a:lvl8pPr marL="3200400" algn="l" defTabSz="457200" rtl="0" eaLnBrk="1" latinLnBrk="0" hangingPunct="1">
-      <a:defRPr sz="1800" kern="1200">
+    <a:lvl8pPr marL="3200400" algn="l" defTabSz="914400" rtl="0" eaLnBrk="1" latinLnBrk="0" hangingPunct="1">
+      <a:defRPr sz="1200" kern="1200">
         <a:solidFill>
           <a:schemeClr val="tx1"/>
         </a:solidFill>
@@ -93,8 +557,8 @@
         <a:cs typeface="+mn-cs"/>
       </a:defRPr>
     </a:lvl8pPr>
-    <a:lvl9pPr marL="3657600" algn="l" defTabSz="457200" rtl="0" eaLnBrk="1" latinLnBrk="0" hangingPunct="1">
-      <a:defRPr sz="1800" kern="1200">
+    <a:lvl9pPr marL="3657600" algn="l" defTabSz="914400" rtl="0" eaLnBrk="1" latinLnBrk="0" hangingPunct="1">
+      <a:defRPr sz="1200" kern="1200">
         <a:solidFill>
           <a:schemeClr val="tx1"/>
         </a:solidFill>
@@ -103,8 +567,8 @@
         <a:cs typeface="+mn-cs"/>
       </a:defRPr>
     </a:lvl9pPr>
-  </p:defaultTextStyle>
-</p:presentation>
+  </p:notesStyle>
+</p:notesMaster>
 </file>
 
 <file path=ppt/slideLayouts/slideLayout1.xml><?xml version="1.0" encoding="utf-8"?>
@@ -136,9 +600,12 @@
         </p:nvSpPr>
         <p:spPr>
           <a:xfrm>
-            <a:off x="685800" y="2130425"/>
-            <a:ext cx="7772400" cy="1470025"/>
+            <a:off x="754063" y="2414588"/>
+            <a:ext cx="8550275" cy="1665287"/>
           </a:xfrm>
+          <a:prstGeom prst="rect">
+            <a:avLst/>
+          </a:prstGeom>
         </p:spPr>
         <p:txBody>
           <a:bodyPr/>
@@ -164,102 +631,51 @@
         </p:nvSpPr>
         <p:spPr>
           <a:xfrm>
-            <a:off x="1371600" y="3886200"/>
-            <a:ext cx="6400800" cy="1752600"/>
+            <a:off x="1508125" y="4403725"/>
+            <a:ext cx="7042150" cy="1987550"/>
           </a:xfrm>
+          <a:prstGeom prst="rect">
+            <a:avLst/>
+          </a:prstGeom>
         </p:spPr>
         <p:txBody>
           <a:bodyPr/>
           <a:lstStyle>
             <a:lvl1pPr marL="0" indent="0" algn="ctr">
               <a:buNone/>
-              <a:defRPr>
-                <a:solidFill>
-                  <a:schemeClr val="tx1">
-                    <a:tint val="75000"/>
-                  </a:schemeClr>
-                </a:solidFill>
-              </a:defRPr>
+              <a:defRPr/>
             </a:lvl1pPr>
             <a:lvl2pPr marL="457200" indent="0" algn="ctr">
               <a:buNone/>
-              <a:defRPr>
-                <a:solidFill>
-                  <a:schemeClr val="tx1">
-                    <a:tint val="75000"/>
-                  </a:schemeClr>
-                </a:solidFill>
-              </a:defRPr>
+              <a:defRPr/>
             </a:lvl2pPr>
             <a:lvl3pPr marL="914400" indent="0" algn="ctr">
               <a:buNone/>
-              <a:defRPr>
-                <a:solidFill>
-                  <a:schemeClr val="tx1">
-                    <a:tint val="75000"/>
-                  </a:schemeClr>
-                </a:solidFill>
-              </a:defRPr>
+              <a:defRPr/>
             </a:lvl3pPr>
             <a:lvl4pPr marL="1371600" indent="0" algn="ctr">
               <a:buNone/>
-              <a:defRPr>
-                <a:solidFill>
-                  <a:schemeClr val="tx1">
-                    <a:tint val="75000"/>
-                  </a:schemeClr>
-                </a:solidFill>
-              </a:defRPr>
+              <a:defRPr/>
             </a:lvl4pPr>
             <a:lvl5pPr marL="1828800" indent="0" algn="ctr">
               <a:buNone/>
-              <a:defRPr>
-                <a:solidFill>
-                  <a:schemeClr val="tx1">
-                    <a:tint val="75000"/>
-                  </a:schemeClr>
-                </a:solidFill>
-              </a:defRPr>
+              <a:defRPr/>
             </a:lvl5pPr>
             <a:lvl6pPr marL="2286000" indent="0" algn="ctr">
               <a:buNone/>
-              <a:defRPr>
-                <a:solidFill>
-                  <a:schemeClr val="tx1">
-                    <a:tint val="75000"/>
-                  </a:schemeClr>
-                </a:solidFill>
-              </a:defRPr>
+              <a:defRPr/>
             </a:lvl6pPr>
             <a:lvl7pPr marL="2743200" indent="0" algn="ctr">
               <a:buNone/>
-              <a:defRPr>
-                <a:solidFill>
-                  <a:schemeClr val="tx1">
-                    <a:tint val="75000"/>
-                  </a:schemeClr>
-                </a:solidFill>
-              </a:defRPr>
+              <a:defRPr/>
             </a:lvl7pPr>
             <a:lvl8pPr marL="3200400" indent="0" algn="ctr">
               <a:buNone/>
-              <a:defRPr>
-                <a:solidFill>
-                  <a:schemeClr val="tx1">
-                    <a:tint val="75000"/>
-                  </a:schemeClr>
-                </a:solidFill>
-              </a:defRPr>
+              <a:defRPr/>
             </a:lvl8pPr>
             <a:lvl9pPr marL="3657600" indent="0" algn="ctr">
               <a:buNone/>
-              <a:defRPr>
-                <a:solidFill>
-                  <a:schemeClr val="tx1">
-                    <a:tint val="75000"/>
-                  </a:schemeClr>
-                </a:solidFill>
-              </a:defRPr>
+              <a:defRPr/>
             </a:lvl9pPr>
           </a:lstStyle>
           <a:p>
@@ -267,81 +683,11 @@
               <a:rPr lang="en-US" smtClean="0"/>
               <a:t>Click to edit Master subtitle style</a:t>
             </a:r>
-            <a:endParaRPr lang="en-US"/>
-          </a:p>
-        </p:txBody>
-      </p:sp>
-      <p:sp>
-        <p:nvSpPr>
-          <p:cNvPr id="4" name="Date Placeholder 3"/>
-          <p:cNvSpPr>
-            <a:spLocks noGrp="1"/>
-          </p:cNvSpPr>
-          <p:nvPr>
-            <p:ph type="dt" sz="half" idx="10"/>
-          </p:nvPr>
-        </p:nvSpPr>
-        <p:spPr/>
-        <p:txBody>
-          <a:bodyPr/>
-          <a:lstStyle/>
-          <a:p>
-            <a:fld id="{5BCAD085-E8A6-8845-BD4E-CB4CCA059FC4}" type="datetimeFigureOut">
-              <a:rPr lang="en-US" smtClean="0"/>
-              <a:t>1/27/13</a:t>
-            </a:fld>
-            <a:endParaRPr lang="en-US"/>
-          </a:p>
-        </p:txBody>
-      </p:sp>
-      <p:sp>
-        <p:nvSpPr>
-          <p:cNvPr id="5" name="Footer Placeholder 4"/>
-          <p:cNvSpPr>
-            <a:spLocks noGrp="1"/>
-          </p:cNvSpPr>
-          <p:nvPr>
-            <p:ph type="ftr" sz="quarter" idx="11"/>
-          </p:nvPr>
-        </p:nvSpPr>
-        <p:spPr/>
-        <p:txBody>
-          <a:bodyPr/>
-          <a:lstStyle/>
-          <a:p>
-            <a:endParaRPr lang="en-US"/>
-          </a:p>
-        </p:txBody>
-      </p:sp>
-      <p:sp>
-        <p:nvSpPr>
-          <p:cNvPr id="6" name="Slide Number Placeholder 5"/>
-          <p:cNvSpPr>
-            <a:spLocks noGrp="1"/>
-          </p:cNvSpPr>
-          <p:nvPr>
-            <p:ph type="sldNum" sz="quarter" idx="12"/>
-          </p:nvPr>
-        </p:nvSpPr>
-        <p:spPr/>
-        <p:txBody>
-          <a:bodyPr/>
-          <a:lstStyle/>
-          <a:p>
-            <a:fld id="{C1FF6DA9-008F-8B48-92A6-B652298478BF}" type="slidenum">
-              <a:rPr lang="en-US" smtClean="0"/>
-              <a:t>‹#›</a:t>
-            </a:fld>
             <a:endParaRPr lang="en-US"/>
           </a:p>
         </p:txBody>
       </p:sp>
     </p:spTree>
-    <p:extLst>
-      <p:ext uri="{BB962C8B-B14F-4D97-AF65-F5344CB8AC3E}">
-        <p14:creationId xmlns:p14="http://schemas.microsoft.com/office/powerpoint/2010/main" val="3168075583"/>
-      </p:ext>
-    </p:extLst>
   </p:cSld>
   <p:clrMapOvr>
     <a:masterClrMapping/>
@@ -376,7 +722,15 @@
             <p:ph type="title"/>
           </p:nvPr>
         </p:nvSpPr>
-        <p:spPr/>
+        <p:spPr>
+          <a:xfrm>
+            <a:off x="503238" y="311150"/>
+            <a:ext cx="9051925" cy="1295400"/>
+          </a:xfrm>
+          <a:prstGeom prst="rect">
+            <a:avLst/>
+          </a:prstGeom>
+        </p:spPr>
         <p:txBody>
           <a:bodyPr/>
           <a:lstStyle/>
@@ -399,7 +753,15 @@
             <p:ph type="body" orient="vert" idx="1"/>
           </p:nvPr>
         </p:nvSpPr>
-        <p:spPr/>
+        <p:spPr>
+          <a:xfrm>
+            <a:off x="503238" y="1812925"/>
+            <a:ext cx="9051925" cy="5130800"/>
+          </a:xfrm>
+          <a:prstGeom prst="rect">
+            <a:avLst/>
+          </a:prstGeom>
+        </p:spPr>
         <p:txBody>
           <a:bodyPr vert="eaVert"/>
           <a:lstStyle/>
@@ -441,77 +803,7 @@
           </a:p>
         </p:txBody>
       </p:sp>
-      <p:sp>
-        <p:nvSpPr>
-          <p:cNvPr id="4" name="Date Placeholder 3"/>
-          <p:cNvSpPr>
-            <a:spLocks noGrp="1"/>
-          </p:cNvSpPr>
-          <p:nvPr>
-            <p:ph type="dt" sz="half" idx="10"/>
-          </p:nvPr>
-        </p:nvSpPr>
-        <p:spPr/>
-        <p:txBody>
-          <a:bodyPr/>
-          <a:lstStyle/>
-          <a:p>
-            <a:fld id="{5BCAD085-E8A6-8845-BD4E-CB4CCA059FC4}" type="datetimeFigureOut">
-              <a:rPr lang="en-US" smtClean="0"/>
-              <a:t>1/27/13</a:t>
-            </a:fld>
-            <a:endParaRPr lang="en-US"/>
-          </a:p>
-        </p:txBody>
-      </p:sp>
-      <p:sp>
-        <p:nvSpPr>
-          <p:cNvPr id="5" name="Footer Placeholder 4"/>
-          <p:cNvSpPr>
-            <a:spLocks noGrp="1"/>
-          </p:cNvSpPr>
-          <p:nvPr>
-            <p:ph type="ftr" sz="quarter" idx="11"/>
-          </p:nvPr>
-        </p:nvSpPr>
-        <p:spPr/>
-        <p:txBody>
-          <a:bodyPr/>
-          <a:lstStyle/>
-          <a:p>
-            <a:endParaRPr lang="en-US"/>
-          </a:p>
-        </p:txBody>
-      </p:sp>
-      <p:sp>
-        <p:nvSpPr>
-          <p:cNvPr id="6" name="Slide Number Placeholder 5"/>
-          <p:cNvSpPr>
-            <a:spLocks noGrp="1"/>
-          </p:cNvSpPr>
-          <p:nvPr>
-            <p:ph type="sldNum" sz="quarter" idx="12"/>
-          </p:nvPr>
-        </p:nvSpPr>
-        <p:spPr/>
-        <p:txBody>
-          <a:bodyPr/>
-          <a:lstStyle/>
-          <a:p>
-            <a:fld id="{C1FF6DA9-008F-8B48-92A6-B652298478BF}" type="slidenum">
-              <a:rPr lang="en-US" smtClean="0"/>
-              <a:t>‹#›</a:t>
-            </a:fld>
-            <a:endParaRPr lang="en-US"/>
-          </a:p>
-        </p:txBody>
-      </p:sp>
     </p:spTree>
-    <p:extLst>
-      <p:ext uri="{BB962C8B-B14F-4D97-AF65-F5344CB8AC3E}">
-        <p14:creationId xmlns:p14="http://schemas.microsoft.com/office/powerpoint/2010/main" val="2910927964"/>
-      </p:ext>
-    </p:extLst>
   </p:cSld>
   <p:clrMapOvr>
     <a:masterClrMapping/>
@@ -548,9 +840,12 @@
         </p:nvSpPr>
         <p:spPr>
           <a:xfrm>
-            <a:off x="6629400" y="274638"/>
-            <a:ext cx="2057400" cy="5851525"/>
+            <a:off x="7292975" y="311150"/>
+            <a:ext cx="2262188" cy="6632575"/>
           </a:xfrm>
+          <a:prstGeom prst="rect">
+            <a:avLst/>
+          </a:prstGeom>
         </p:spPr>
         <p:txBody>
           <a:bodyPr vert="eaVert"/>
@@ -576,9 +871,12 @@
         </p:nvSpPr>
         <p:spPr>
           <a:xfrm>
-            <a:off x="457200" y="274638"/>
-            <a:ext cx="6019800" cy="5851525"/>
+            <a:off x="503238" y="311150"/>
+            <a:ext cx="6637337" cy="6632575"/>
           </a:xfrm>
+          <a:prstGeom prst="rect">
+            <a:avLst/>
+          </a:prstGeom>
         </p:spPr>
         <p:txBody>
           <a:bodyPr vert="eaVert"/>
@@ -621,77 +919,7 @@
           </a:p>
         </p:txBody>
       </p:sp>
-      <p:sp>
-        <p:nvSpPr>
-          <p:cNvPr id="4" name="Date Placeholder 3"/>
-          <p:cNvSpPr>
-            <a:spLocks noGrp="1"/>
-          </p:cNvSpPr>
-          <p:nvPr>
-            <p:ph type="dt" sz="half" idx="10"/>
-          </p:nvPr>
-        </p:nvSpPr>
-        <p:spPr/>
-        <p:txBody>
-          <a:bodyPr/>
-          <a:lstStyle/>
-          <a:p>
-            <a:fld id="{5BCAD085-E8A6-8845-BD4E-CB4CCA059FC4}" type="datetimeFigureOut">
-              <a:rPr lang="en-US" smtClean="0"/>
-              <a:t>1/27/13</a:t>
-            </a:fld>
-            <a:endParaRPr lang="en-US"/>
-          </a:p>
-        </p:txBody>
-      </p:sp>
-      <p:sp>
-        <p:nvSpPr>
-          <p:cNvPr id="5" name="Footer Placeholder 4"/>
-          <p:cNvSpPr>
-            <a:spLocks noGrp="1"/>
-          </p:cNvSpPr>
-          <p:nvPr>
-            <p:ph type="ftr" sz="quarter" idx="11"/>
-          </p:nvPr>
-        </p:nvSpPr>
-        <p:spPr/>
-        <p:txBody>
-          <a:bodyPr/>
-          <a:lstStyle/>
-          <a:p>
-            <a:endParaRPr lang="en-US"/>
-          </a:p>
-        </p:txBody>
-      </p:sp>
-      <p:sp>
-        <p:nvSpPr>
-          <p:cNvPr id="6" name="Slide Number Placeholder 5"/>
-          <p:cNvSpPr>
-            <a:spLocks noGrp="1"/>
-          </p:cNvSpPr>
-          <p:nvPr>
-            <p:ph type="sldNum" sz="quarter" idx="12"/>
-          </p:nvPr>
-        </p:nvSpPr>
-        <p:spPr/>
-        <p:txBody>
-          <a:bodyPr/>
-          <a:lstStyle/>
-          <a:p>
-            <a:fld id="{C1FF6DA9-008F-8B48-92A6-B652298478BF}" type="slidenum">
-              <a:rPr lang="en-US" smtClean="0"/>
-              <a:t>‹#›</a:t>
-            </a:fld>
-            <a:endParaRPr lang="en-US"/>
-          </a:p>
-        </p:txBody>
-      </p:sp>
     </p:spTree>
-    <p:extLst>
-      <p:ext uri="{BB962C8B-B14F-4D97-AF65-F5344CB8AC3E}">
-        <p14:creationId xmlns:p14="http://schemas.microsoft.com/office/powerpoint/2010/main" val="3612223792"/>
-      </p:ext>
-    </p:extLst>
   </p:cSld>
   <p:clrMapOvr>
     <a:masterClrMapping/>
@@ -726,7 +954,15 @@
             <p:ph type="title"/>
           </p:nvPr>
         </p:nvSpPr>
-        <p:spPr/>
+        <p:spPr>
+          <a:xfrm>
+            <a:off x="503238" y="311150"/>
+            <a:ext cx="9051925" cy="1295400"/>
+          </a:xfrm>
+          <a:prstGeom prst="rect">
+            <a:avLst/>
+          </a:prstGeom>
+        </p:spPr>
         <p:txBody>
           <a:bodyPr/>
           <a:lstStyle/>
@@ -749,7 +985,15 @@
             <p:ph idx="1"/>
           </p:nvPr>
         </p:nvSpPr>
-        <p:spPr/>
+        <p:spPr>
+          <a:xfrm>
+            <a:off x="503238" y="1812925"/>
+            <a:ext cx="9051925" cy="5130800"/>
+          </a:xfrm>
+          <a:prstGeom prst="rect">
+            <a:avLst/>
+          </a:prstGeom>
+        </p:spPr>
         <p:txBody>
           <a:bodyPr/>
           <a:lstStyle/>
@@ -791,77 +1035,7 @@
           </a:p>
         </p:txBody>
       </p:sp>
-      <p:sp>
-        <p:nvSpPr>
-          <p:cNvPr id="4" name="Date Placeholder 3"/>
-          <p:cNvSpPr>
-            <a:spLocks noGrp="1"/>
-          </p:cNvSpPr>
-          <p:nvPr>
-            <p:ph type="dt" sz="half" idx="10"/>
-          </p:nvPr>
-        </p:nvSpPr>
-        <p:spPr/>
-        <p:txBody>
-          <a:bodyPr/>
-          <a:lstStyle/>
-          <a:p>
-            <a:fld id="{5BCAD085-E8A6-8845-BD4E-CB4CCA059FC4}" type="datetimeFigureOut">
-              <a:rPr lang="en-US" smtClean="0"/>
-              <a:t>1/27/13</a:t>
-            </a:fld>
-            <a:endParaRPr lang="en-US"/>
-          </a:p>
-        </p:txBody>
-      </p:sp>
-      <p:sp>
-        <p:nvSpPr>
-          <p:cNvPr id="5" name="Footer Placeholder 4"/>
-          <p:cNvSpPr>
-            <a:spLocks noGrp="1"/>
-          </p:cNvSpPr>
-          <p:nvPr>
-            <p:ph type="ftr" sz="quarter" idx="11"/>
-          </p:nvPr>
-        </p:nvSpPr>
-        <p:spPr/>
-        <p:txBody>
-          <a:bodyPr/>
-          <a:lstStyle/>
-          <a:p>
-            <a:endParaRPr lang="en-US"/>
-          </a:p>
-        </p:txBody>
-      </p:sp>
-      <p:sp>
-        <p:nvSpPr>
-          <p:cNvPr id="6" name="Slide Number Placeholder 5"/>
-          <p:cNvSpPr>
-            <a:spLocks noGrp="1"/>
-          </p:cNvSpPr>
-          <p:nvPr>
-            <p:ph type="sldNum" sz="quarter" idx="12"/>
-          </p:nvPr>
-        </p:nvSpPr>
-        <p:spPr/>
-        <p:txBody>
-          <a:bodyPr/>
-          <a:lstStyle/>
-          <a:p>
-            <a:fld id="{C1FF6DA9-008F-8B48-92A6-B652298478BF}" type="slidenum">
-              <a:rPr lang="en-US" smtClean="0"/>
-              <a:t>‹#›</a:t>
-            </a:fld>
-            <a:endParaRPr lang="en-US"/>
-          </a:p>
-        </p:txBody>
-      </p:sp>
     </p:spTree>
-    <p:extLst>
-      <p:ext uri="{BB962C8B-B14F-4D97-AF65-F5344CB8AC3E}">
-        <p14:creationId xmlns:p14="http://schemas.microsoft.com/office/powerpoint/2010/main" val="2614314258"/>
-      </p:ext>
-    </p:extLst>
   </p:cSld>
   <p:clrMapOvr>
     <a:masterClrMapping/>
@@ -898,9 +1072,12 @@
         </p:nvSpPr>
         <p:spPr>
           <a:xfrm>
-            <a:off x="722313" y="4406900"/>
-            <a:ext cx="7772400" cy="1362075"/>
+            <a:off x="795338" y="4994275"/>
+            <a:ext cx="8548687" cy="1544638"/>
           </a:xfrm>
+          <a:prstGeom prst="rect">
+            <a:avLst/>
+          </a:prstGeom>
         </p:spPr>
         <p:txBody>
           <a:bodyPr anchor="t"/>
@@ -930,102 +1107,51 @@
         </p:nvSpPr>
         <p:spPr>
           <a:xfrm>
-            <a:off x="722313" y="2906713"/>
-            <a:ext cx="7772400" cy="1500187"/>
+            <a:off x="795338" y="3294063"/>
+            <a:ext cx="8548687" cy="1700212"/>
           </a:xfrm>
+          <a:prstGeom prst="rect">
+            <a:avLst/>
+          </a:prstGeom>
         </p:spPr>
         <p:txBody>
           <a:bodyPr anchor="b"/>
           <a:lstStyle>
             <a:lvl1pPr marL="0" indent="0">
               <a:buNone/>
-              <a:defRPr sz="2000">
-                <a:solidFill>
-                  <a:schemeClr val="tx1">
-                    <a:tint val="75000"/>
-                  </a:schemeClr>
-                </a:solidFill>
-              </a:defRPr>
+              <a:defRPr sz="2000"/>
             </a:lvl1pPr>
             <a:lvl2pPr marL="457200" indent="0">
               <a:buNone/>
-              <a:defRPr sz="1800">
-                <a:solidFill>
-                  <a:schemeClr val="tx1">
-                    <a:tint val="75000"/>
-                  </a:schemeClr>
-                </a:solidFill>
-              </a:defRPr>
+              <a:defRPr sz="1800"/>
             </a:lvl2pPr>
             <a:lvl3pPr marL="914400" indent="0">
               <a:buNone/>
-              <a:defRPr sz="1600">
-                <a:solidFill>
-                  <a:schemeClr val="tx1">
-                    <a:tint val="75000"/>
-                  </a:schemeClr>
-                </a:solidFill>
-              </a:defRPr>
+              <a:defRPr sz="1600"/>
             </a:lvl3pPr>
             <a:lvl4pPr marL="1371600" indent="0">
               <a:buNone/>
-              <a:defRPr sz="1400">
-                <a:solidFill>
-                  <a:schemeClr val="tx1">
-                    <a:tint val="75000"/>
-                  </a:schemeClr>
-                </a:solidFill>
-              </a:defRPr>
+              <a:defRPr sz="1400"/>
             </a:lvl4pPr>
             <a:lvl5pPr marL="1828800" indent="0">
               <a:buNone/>
-              <a:defRPr sz="1400">
-                <a:solidFill>
-                  <a:schemeClr val="tx1">
-                    <a:tint val="75000"/>
-                  </a:schemeClr>
-                </a:solidFill>
-              </a:defRPr>
+              <a:defRPr sz="1400"/>
             </a:lvl5pPr>
             <a:lvl6pPr marL="2286000" indent="0">
               <a:buNone/>
-              <a:defRPr sz="1400">
-                <a:solidFill>
-                  <a:schemeClr val="tx1">
-                    <a:tint val="75000"/>
-                  </a:schemeClr>
-                </a:solidFill>
-              </a:defRPr>
+              <a:defRPr sz="1400"/>
             </a:lvl6pPr>
             <a:lvl7pPr marL="2743200" indent="0">
               <a:buNone/>
-              <a:defRPr sz="1400">
-                <a:solidFill>
-                  <a:schemeClr val="tx1">
-                    <a:tint val="75000"/>
-                  </a:schemeClr>
-                </a:solidFill>
-              </a:defRPr>
+              <a:defRPr sz="1400"/>
             </a:lvl7pPr>
             <a:lvl8pPr marL="3200400" indent="0">
               <a:buNone/>
-              <a:defRPr sz="1400">
-                <a:solidFill>
-                  <a:schemeClr val="tx1">
-                    <a:tint val="75000"/>
-                  </a:schemeClr>
-                </a:solidFill>
-              </a:defRPr>
+              <a:defRPr sz="1400"/>
             </a:lvl8pPr>
             <a:lvl9pPr marL="3657600" indent="0">
               <a:buNone/>
-              <a:defRPr sz="1400">
-                <a:solidFill>
-                  <a:schemeClr val="tx1">
-                    <a:tint val="75000"/>
-                  </a:schemeClr>
-                </a:solidFill>
-              </a:defRPr>
+              <a:defRPr sz="1400"/>
             </a:lvl9pPr>
           </a:lstStyle>
           <a:p>
@@ -1034,80 +1160,10 @@
               <a:rPr lang="en-US" smtClean="0"/>
               <a:t>Click to edit Master text styles</a:t>
             </a:r>
-          </a:p>
-        </p:txBody>
-      </p:sp>
-      <p:sp>
-        <p:nvSpPr>
-          <p:cNvPr id="4" name="Date Placeholder 3"/>
-          <p:cNvSpPr>
-            <a:spLocks noGrp="1"/>
-          </p:cNvSpPr>
-          <p:nvPr>
-            <p:ph type="dt" sz="half" idx="10"/>
-          </p:nvPr>
-        </p:nvSpPr>
-        <p:spPr/>
-        <p:txBody>
-          <a:bodyPr/>
-          <a:lstStyle/>
-          <a:p>
-            <a:fld id="{5BCAD085-E8A6-8845-BD4E-CB4CCA059FC4}" type="datetimeFigureOut">
-              <a:rPr lang="en-US" smtClean="0"/>
-              <a:t>1/27/13</a:t>
-            </a:fld>
-            <a:endParaRPr lang="en-US"/>
-          </a:p>
-        </p:txBody>
-      </p:sp>
-      <p:sp>
-        <p:nvSpPr>
-          <p:cNvPr id="5" name="Footer Placeholder 4"/>
-          <p:cNvSpPr>
-            <a:spLocks noGrp="1"/>
-          </p:cNvSpPr>
-          <p:nvPr>
-            <p:ph type="ftr" sz="quarter" idx="11"/>
-          </p:nvPr>
-        </p:nvSpPr>
-        <p:spPr/>
-        <p:txBody>
-          <a:bodyPr/>
-          <a:lstStyle/>
-          <a:p>
-            <a:endParaRPr lang="en-US"/>
-          </a:p>
-        </p:txBody>
-      </p:sp>
-      <p:sp>
-        <p:nvSpPr>
-          <p:cNvPr id="6" name="Slide Number Placeholder 5"/>
-          <p:cNvSpPr>
-            <a:spLocks noGrp="1"/>
-          </p:cNvSpPr>
-          <p:nvPr>
-            <p:ph type="sldNum" sz="quarter" idx="12"/>
-          </p:nvPr>
-        </p:nvSpPr>
-        <p:spPr/>
-        <p:txBody>
-          <a:bodyPr/>
-          <a:lstStyle/>
-          <a:p>
-            <a:fld id="{C1FF6DA9-008F-8B48-92A6-B652298478BF}" type="slidenum">
-              <a:rPr lang="en-US" smtClean="0"/>
-              <a:t>‹#›</a:t>
-            </a:fld>
-            <a:endParaRPr lang="en-US"/>
           </a:p>
         </p:txBody>
       </p:sp>
     </p:spTree>
-    <p:extLst>
-      <p:ext uri="{BB962C8B-B14F-4D97-AF65-F5344CB8AC3E}">
-        <p14:creationId xmlns:p14="http://schemas.microsoft.com/office/powerpoint/2010/main" val="960648375"/>
-      </p:ext>
-    </p:extLst>
   </p:cSld>
   <p:clrMapOvr>
     <a:masterClrMapping/>
@@ -1142,7 +1198,15 @@
             <p:ph type="title"/>
           </p:nvPr>
         </p:nvSpPr>
-        <p:spPr/>
+        <p:spPr>
+          <a:xfrm>
+            <a:off x="503238" y="311150"/>
+            <a:ext cx="9051925" cy="1295400"/>
+          </a:xfrm>
+          <a:prstGeom prst="rect">
+            <a:avLst/>
+          </a:prstGeom>
+        </p:spPr>
         <p:txBody>
           <a:bodyPr/>
           <a:lstStyle/>
@@ -1167,9 +1231,12 @@
         </p:nvSpPr>
         <p:spPr>
           <a:xfrm>
-            <a:off x="457200" y="1600200"/>
-            <a:ext cx="4038600" cy="4525963"/>
+            <a:off x="503238" y="1812925"/>
+            <a:ext cx="4449762" cy="5130800"/>
           </a:xfrm>
+          <a:prstGeom prst="rect">
+            <a:avLst/>
+          </a:prstGeom>
         </p:spPr>
         <p:txBody>
           <a:bodyPr/>
@@ -1252,9 +1319,12 @@
         </p:nvSpPr>
         <p:spPr>
           <a:xfrm>
-            <a:off x="4648200" y="1600200"/>
-            <a:ext cx="4038600" cy="4525963"/>
+            <a:off x="5105400" y="1812925"/>
+            <a:ext cx="4449763" cy="5130800"/>
           </a:xfrm>
+          <a:prstGeom prst="rect">
+            <a:avLst/>
+          </a:prstGeom>
         </p:spPr>
         <p:txBody>
           <a:bodyPr/>
@@ -1325,77 +1395,7 @@
           </a:p>
         </p:txBody>
       </p:sp>
-      <p:sp>
-        <p:nvSpPr>
-          <p:cNvPr id="5" name="Date Placeholder 4"/>
-          <p:cNvSpPr>
-            <a:spLocks noGrp="1"/>
-          </p:cNvSpPr>
-          <p:nvPr>
-            <p:ph type="dt" sz="half" idx="10"/>
-          </p:nvPr>
-        </p:nvSpPr>
-        <p:spPr/>
-        <p:txBody>
-          <a:bodyPr/>
-          <a:lstStyle/>
-          <a:p>
-            <a:fld id="{5BCAD085-E8A6-8845-BD4E-CB4CCA059FC4}" type="datetimeFigureOut">
-              <a:rPr lang="en-US" smtClean="0"/>
-              <a:t>1/27/13</a:t>
-            </a:fld>
-            <a:endParaRPr lang="en-US"/>
-          </a:p>
-        </p:txBody>
-      </p:sp>
-      <p:sp>
-        <p:nvSpPr>
-          <p:cNvPr id="6" name="Footer Placeholder 5"/>
-          <p:cNvSpPr>
-            <a:spLocks noGrp="1"/>
-          </p:cNvSpPr>
-          <p:nvPr>
-            <p:ph type="ftr" sz="quarter" idx="11"/>
-          </p:nvPr>
-        </p:nvSpPr>
-        <p:spPr/>
-        <p:txBody>
-          <a:bodyPr/>
-          <a:lstStyle/>
-          <a:p>
-            <a:endParaRPr lang="en-US"/>
-          </a:p>
-        </p:txBody>
-      </p:sp>
-      <p:sp>
-        <p:nvSpPr>
-          <p:cNvPr id="7" name="Slide Number Placeholder 6"/>
-          <p:cNvSpPr>
-            <a:spLocks noGrp="1"/>
-          </p:cNvSpPr>
-          <p:nvPr>
-            <p:ph type="sldNum" sz="quarter" idx="12"/>
-          </p:nvPr>
-        </p:nvSpPr>
-        <p:spPr/>
-        <p:txBody>
-          <a:bodyPr/>
-          <a:lstStyle/>
-          <a:p>
-            <a:fld id="{C1FF6DA9-008F-8B48-92A6-B652298478BF}" type="slidenum">
-              <a:rPr lang="en-US" smtClean="0"/>
-              <a:t>‹#›</a:t>
-            </a:fld>
-            <a:endParaRPr lang="en-US"/>
-          </a:p>
-        </p:txBody>
-      </p:sp>
     </p:spTree>
-    <p:extLst>
-      <p:ext uri="{BB962C8B-B14F-4D97-AF65-F5344CB8AC3E}">
-        <p14:creationId xmlns:p14="http://schemas.microsoft.com/office/powerpoint/2010/main" val="2782244947"/>
-      </p:ext>
-    </p:extLst>
   </p:cSld>
   <p:clrMapOvr>
     <a:masterClrMapping/>
@@ -1430,7 +1430,15 @@
             <p:ph type="title"/>
           </p:nvPr>
         </p:nvSpPr>
-        <p:spPr/>
+        <p:spPr>
+          <a:xfrm>
+            <a:off x="503238" y="311150"/>
+            <a:ext cx="9051925" cy="1295400"/>
+          </a:xfrm>
+          <a:prstGeom prst="rect">
+            <a:avLst/>
+          </a:prstGeom>
+        </p:spPr>
         <p:txBody>
           <a:bodyPr/>
           <a:lstStyle>
@@ -1459,9 +1467,12 @@
         </p:nvSpPr>
         <p:spPr>
           <a:xfrm>
-            <a:off x="457200" y="1535113"/>
-            <a:ext cx="4040188" cy="639762"/>
+            <a:off x="503238" y="1739900"/>
+            <a:ext cx="4443412" cy="725488"/>
           </a:xfrm>
+          <a:prstGeom prst="rect">
+            <a:avLst/>
+          </a:prstGeom>
         </p:spPr>
         <p:txBody>
           <a:bodyPr anchor="b"/>
@@ -1524,9 +1535,12 @@
         </p:nvSpPr>
         <p:spPr>
           <a:xfrm>
-            <a:off x="457200" y="2174875"/>
-            <a:ext cx="4040188" cy="3951288"/>
+            <a:off x="503238" y="2465388"/>
+            <a:ext cx="4443412" cy="4478337"/>
           </a:xfrm>
+          <a:prstGeom prst="rect">
+            <a:avLst/>
+          </a:prstGeom>
         </p:spPr>
         <p:txBody>
           <a:bodyPr/>
@@ -1609,9 +1623,12 @@
         </p:nvSpPr>
         <p:spPr>
           <a:xfrm>
-            <a:off x="4645025" y="1535113"/>
-            <a:ext cx="4041775" cy="639762"/>
+            <a:off x="5110163" y="1739900"/>
+            <a:ext cx="4445000" cy="725488"/>
           </a:xfrm>
+          <a:prstGeom prst="rect">
+            <a:avLst/>
+          </a:prstGeom>
         </p:spPr>
         <p:txBody>
           <a:bodyPr anchor="b"/>
@@ -1674,9 +1691,12 @@
         </p:nvSpPr>
         <p:spPr>
           <a:xfrm>
-            <a:off x="4645025" y="2174875"/>
-            <a:ext cx="4041775" cy="3951288"/>
+            <a:off x="5110163" y="2465388"/>
+            <a:ext cx="4445000" cy="4478337"/>
           </a:xfrm>
+          <a:prstGeom prst="rect">
+            <a:avLst/>
+          </a:prstGeom>
         </p:spPr>
         <p:txBody>
           <a:bodyPr/>
@@ -1747,77 +1767,7 @@
           </a:p>
         </p:txBody>
       </p:sp>
-      <p:sp>
-        <p:nvSpPr>
-          <p:cNvPr id="7" name="Date Placeholder 6"/>
-          <p:cNvSpPr>
-            <a:spLocks noGrp="1"/>
-          </p:cNvSpPr>
-          <p:nvPr>
-            <p:ph type="dt" sz="half" idx="10"/>
-          </p:nvPr>
-        </p:nvSpPr>
-        <p:spPr/>
-        <p:txBody>
-          <a:bodyPr/>
-          <a:lstStyle/>
-          <a:p>
-            <a:fld id="{5BCAD085-E8A6-8845-BD4E-CB4CCA059FC4}" type="datetimeFigureOut">
-              <a:rPr lang="en-US" smtClean="0"/>
-              <a:t>1/27/13</a:t>
-            </a:fld>
-            <a:endParaRPr lang="en-US"/>
-          </a:p>
-        </p:txBody>
-      </p:sp>
-      <p:sp>
-        <p:nvSpPr>
-          <p:cNvPr id="8" name="Footer Placeholder 7"/>
-          <p:cNvSpPr>
-            <a:spLocks noGrp="1"/>
-          </p:cNvSpPr>
-          <p:nvPr>
-            <p:ph type="ftr" sz="quarter" idx="11"/>
-          </p:nvPr>
-        </p:nvSpPr>
-        <p:spPr/>
-        <p:txBody>
-          <a:bodyPr/>
-          <a:lstStyle/>
-          <a:p>
-            <a:endParaRPr lang="en-US"/>
-          </a:p>
-        </p:txBody>
-      </p:sp>
-      <p:sp>
-        <p:nvSpPr>
-          <p:cNvPr id="9" name="Slide Number Placeholder 8"/>
-          <p:cNvSpPr>
-            <a:spLocks noGrp="1"/>
-          </p:cNvSpPr>
-          <p:nvPr>
-            <p:ph type="sldNum" sz="quarter" idx="12"/>
-          </p:nvPr>
-        </p:nvSpPr>
-        <p:spPr/>
-        <p:txBody>
-          <a:bodyPr/>
-          <a:lstStyle/>
-          <a:p>
-            <a:fld id="{C1FF6DA9-008F-8B48-92A6-B652298478BF}" type="slidenum">
-              <a:rPr lang="en-US" smtClean="0"/>
-              <a:t>‹#›</a:t>
-            </a:fld>
-            <a:endParaRPr lang="en-US"/>
-          </a:p>
-        </p:txBody>
-      </p:sp>
     </p:spTree>
-    <p:extLst>
-      <p:ext uri="{BB962C8B-B14F-4D97-AF65-F5344CB8AC3E}">
-        <p14:creationId xmlns:p14="http://schemas.microsoft.com/office/powerpoint/2010/main" val="990158736"/>
-      </p:ext>
-    </p:extLst>
   </p:cSld>
   <p:clrMapOvr>
     <a:masterClrMapping/>
@@ -1852,7 +1802,15 @@
             <p:ph type="title"/>
           </p:nvPr>
         </p:nvSpPr>
-        <p:spPr/>
+        <p:spPr>
+          <a:xfrm>
+            <a:off x="503238" y="311150"/>
+            <a:ext cx="9051925" cy="1295400"/>
+          </a:xfrm>
+          <a:prstGeom prst="rect">
+            <a:avLst/>
+          </a:prstGeom>
+        </p:spPr>
         <p:txBody>
           <a:bodyPr/>
           <a:lstStyle/>
@@ -1865,77 +1823,7 @@
           </a:p>
         </p:txBody>
       </p:sp>
-      <p:sp>
-        <p:nvSpPr>
-          <p:cNvPr id="3" name="Date Placeholder 2"/>
-          <p:cNvSpPr>
-            <a:spLocks noGrp="1"/>
-          </p:cNvSpPr>
-          <p:nvPr>
-            <p:ph type="dt" sz="half" idx="10"/>
-          </p:nvPr>
-        </p:nvSpPr>
-        <p:spPr/>
-        <p:txBody>
-          <a:bodyPr/>
-          <a:lstStyle/>
-          <a:p>
-            <a:fld id="{5BCAD085-E8A6-8845-BD4E-CB4CCA059FC4}" type="datetimeFigureOut">
-              <a:rPr lang="en-US" smtClean="0"/>
-              <a:t>1/27/13</a:t>
-            </a:fld>
-            <a:endParaRPr lang="en-US"/>
-          </a:p>
-        </p:txBody>
-      </p:sp>
-      <p:sp>
-        <p:nvSpPr>
-          <p:cNvPr id="4" name="Footer Placeholder 3"/>
-          <p:cNvSpPr>
-            <a:spLocks noGrp="1"/>
-          </p:cNvSpPr>
-          <p:nvPr>
-            <p:ph type="ftr" sz="quarter" idx="11"/>
-          </p:nvPr>
-        </p:nvSpPr>
-        <p:spPr/>
-        <p:txBody>
-          <a:bodyPr/>
-          <a:lstStyle/>
-          <a:p>
-            <a:endParaRPr lang="en-US"/>
-          </a:p>
-        </p:txBody>
-      </p:sp>
-      <p:sp>
-        <p:nvSpPr>
-          <p:cNvPr id="5" name="Slide Number Placeholder 4"/>
-          <p:cNvSpPr>
-            <a:spLocks noGrp="1"/>
-          </p:cNvSpPr>
-          <p:nvPr>
-            <p:ph type="sldNum" sz="quarter" idx="12"/>
-          </p:nvPr>
-        </p:nvSpPr>
-        <p:spPr/>
-        <p:txBody>
-          <a:bodyPr/>
-          <a:lstStyle/>
-          <a:p>
-            <a:fld id="{C1FF6DA9-008F-8B48-92A6-B652298478BF}" type="slidenum">
-              <a:rPr lang="en-US" smtClean="0"/>
-              <a:t>‹#›</a:t>
-            </a:fld>
-            <a:endParaRPr lang="en-US"/>
-          </a:p>
-        </p:txBody>
-      </p:sp>
     </p:spTree>
-    <p:extLst>
-      <p:ext uri="{BB962C8B-B14F-4D97-AF65-F5344CB8AC3E}">
-        <p14:creationId xmlns:p14="http://schemas.microsoft.com/office/powerpoint/2010/main" val="727027711"/>
-      </p:ext>
-    </p:extLst>
   </p:cSld>
   <p:clrMapOvr>
     <a:masterClrMapping/>
@@ -1960,77 +1848,7 @@
           <a:chExt cx="0" cy="0"/>
         </a:xfrm>
       </p:grpSpPr>
-      <p:sp>
-        <p:nvSpPr>
-          <p:cNvPr id="2" name="Date Placeholder 1"/>
-          <p:cNvSpPr>
-            <a:spLocks noGrp="1"/>
-          </p:cNvSpPr>
-          <p:nvPr>
-            <p:ph type="dt" sz="half" idx="10"/>
-          </p:nvPr>
-        </p:nvSpPr>
-        <p:spPr/>
-        <p:txBody>
-          <a:bodyPr/>
-          <a:lstStyle/>
-          <a:p>
-            <a:fld id="{5BCAD085-E8A6-8845-BD4E-CB4CCA059FC4}" type="datetimeFigureOut">
-              <a:rPr lang="en-US" smtClean="0"/>
-              <a:t>1/27/13</a:t>
-            </a:fld>
-            <a:endParaRPr lang="en-US"/>
-          </a:p>
-        </p:txBody>
-      </p:sp>
-      <p:sp>
-        <p:nvSpPr>
-          <p:cNvPr id="3" name="Footer Placeholder 2"/>
-          <p:cNvSpPr>
-            <a:spLocks noGrp="1"/>
-          </p:cNvSpPr>
-          <p:nvPr>
-            <p:ph type="ftr" sz="quarter" idx="11"/>
-          </p:nvPr>
-        </p:nvSpPr>
-        <p:spPr/>
-        <p:txBody>
-          <a:bodyPr/>
-          <a:lstStyle/>
-          <a:p>
-            <a:endParaRPr lang="en-US"/>
-          </a:p>
-        </p:txBody>
-      </p:sp>
-      <p:sp>
-        <p:nvSpPr>
-          <p:cNvPr id="4" name="Slide Number Placeholder 3"/>
-          <p:cNvSpPr>
-            <a:spLocks noGrp="1"/>
-          </p:cNvSpPr>
-          <p:nvPr>
-            <p:ph type="sldNum" sz="quarter" idx="12"/>
-          </p:nvPr>
-        </p:nvSpPr>
-        <p:spPr/>
-        <p:txBody>
-          <a:bodyPr/>
-          <a:lstStyle/>
-          <a:p>
-            <a:fld id="{C1FF6DA9-008F-8B48-92A6-B652298478BF}" type="slidenum">
-              <a:rPr lang="en-US" smtClean="0"/>
-              <a:t>‹#›</a:t>
-            </a:fld>
-            <a:endParaRPr lang="en-US"/>
-          </a:p>
-        </p:txBody>
-      </p:sp>
     </p:spTree>
-    <p:extLst>
-      <p:ext uri="{BB962C8B-B14F-4D97-AF65-F5344CB8AC3E}">
-        <p14:creationId xmlns:p14="http://schemas.microsoft.com/office/powerpoint/2010/main" val="1212999818"/>
-      </p:ext>
-    </p:extLst>
   </p:cSld>
   <p:clrMapOvr>
     <a:masterClrMapping/>
@@ -2067,9 +1885,12 @@
         </p:nvSpPr>
         <p:spPr>
           <a:xfrm>
-            <a:off x="457200" y="273050"/>
-            <a:ext cx="3008313" cy="1162050"/>
+            <a:off x="503238" y="309563"/>
+            <a:ext cx="3308350" cy="1317625"/>
           </a:xfrm>
+          <a:prstGeom prst="rect">
+            <a:avLst/>
+          </a:prstGeom>
         </p:spPr>
         <p:txBody>
           <a:bodyPr anchor="b"/>
@@ -2099,9 +1920,12 @@
         </p:nvSpPr>
         <p:spPr>
           <a:xfrm>
-            <a:off x="3575050" y="273050"/>
-            <a:ext cx="5111750" cy="5853113"/>
+            <a:off x="3932238" y="309563"/>
+            <a:ext cx="5622925" cy="6634162"/>
           </a:xfrm>
+          <a:prstGeom prst="rect">
+            <a:avLst/>
+          </a:prstGeom>
         </p:spPr>
         <p:txBody>
           <a:bodyPr/>
@@ -2184,9 +2008,12 @@
         </p:nvSpPr>
         <p:spPr>
           <a:xfrm>
-            <a:off x="457200" y="1435100"/>
-            <a:ext cx="3008313" cy="4691063"/>
+            <a:off x="503238" y="1627188"/>
+            <a:ext cx="3308350" cy="5316537"/>
           </a:xfrm>
+          <a:prstGeom prst="rect">
+            <a:avLst/>
+          </a:prstGeom>
         </p:spPr>
         <p:txBody>
           <a:bodyPr/>
@@ -2237,77 +2064,7 @@
           </a:p>
         </p:txBody>
       </p:sp>
-      <p:sp>
-        <p:nvSpPr>
-          <p:cNvPr id="5" name="Date Placeholder 4"/>
-          <p:cNvSpPr>
-            <a:spLocks noGrp="1"/>
-          </p:cNvSpPr>
-          <p:nvPr>
-            <p:ph type="dt" sz="half" idx="10"/>
-          </p:nvPr>
-        </p:nvSpPr>
-        <p:spPr/>
-        <p:txBody>
-          <a:bodyPr/>
-          <a:lstStyle/>
-          <a:p>
-            <a:fld id="{5BCAD085-E8A6-8845-BD4E-CB4CCA059FC4}" type="datetimeFigureOut">
-              <a:rPr lang="en-US" smtClean="0"/>
-              <a:t>1/27/13</a:t>
-            </a:fld>
-            <a:endParaRPr lang="en-US"/>
-          </a:p>
-        </p:txBody>
-      </p:sp>
-      <p:sp>
-        <p:nvSpPr>
-          <p:cNvPr id="6" name="Footer Placeholder 5"/>
-          <p:cNvSpPr>
-            <a:spLocks noGrp="1"/>
-          </p:cNvSpPr>
-          <p:nvPr>
-            <p:ph type="ftr" sz="quarter" idx="11"/>
-          </p:nvPr>
-        </p:nvSpPr>
-        <p:spPr/>
-        <p:txBody>
-          <a:bodyPr/>
-          <a:lstStyle/>
-          <a:p>
-            <a:endParaRPr lang="en-US"/>
-          </a:p>
-        </p:txBody>
-      </p:sp>
-      <p:sp>
-        <p:nvSpPr>
-          <p:cNvPr id="7" name="Slide Number Placeholder 6"/>
-          <p:cNvSpPr>
-            <a:spLocks noGrp="1"/>
-          </p:cNvSpPr>
-          <p:nvPr>
-            <p:ph type="sldNum" sz="quarter" idx="12"/>
-          </p:nvPr>
-        </p:nvSpPr>
-        <p:spPr/>
-        <p:txBody>
-          <a:bodyPr/>
-          <a:lstStyle/>
-          <a:p>
-            <a:fld id="{C1FF6DA9-008F-8B48-92A6-B652298478BF}" type="slidenum">
-              <a:rPr lang="en-US" smtClean="0"/>
-              <a:t>‹#›</a:t>
-            </a:fld>
-            <a:endParaRPr lang="en-US"/>
-          </a:p>
-        </p:txBody>
-      </p:sp>
     </p:spTree>
-    <p:extLst>
-      <p:ext uri="{BB962C8B-B14F-4D97-AF65-F5344CB8AC3E}">
-        <p14:creationId xmlns:p14="http://schemas.microsoft.com/office/powerpoint/2010/main" val="1840726560"/>
-      </p:ext>
-    </p:extLst>
   </p:cSld>
   <p:clrMapOvr>
     <a:masterClrMapping/>
@@ -2344,9 +2101,12 @@
         </p:nvSpPr>
         <p:spPr>
           <a:xfrm>
-            <a:off x="1792288" y="4800600"/>
-            <a:ext cx="5486400" cy="566738"/>
+            <a:off x="1971675" y="5440363"/>
+            <a:ext cx="6035675" cy="642937"/>
           </a:xfrm>
+          <a:prstGeom prst="rect">
+            <a:avLst/>
+          </a:prstGeom>
         </p:spPr>
         <p:txBody>
           <a:bodyPr anchor="b"/>
@@ -2376,9 +2136,12 @@
         </p:nvSpPr>
         <p:spPr>
           <a:xfrm>
-            <a:off x="1792288" y="612775"/>
-            <a:ext cx="5486400" cy="4114800"/>
+            <a:off x="1971675" y="693738"/>
+            <a:ext cx="6035675" cy="4664075"/>
           </a:xfrm>
+          <a:prstGeom prst="rect">
+            <a:avLst/>
+          </a:prstGeom>
         </p:spPr>
         <p:txBody>
           <a:bodyPr/>
@@ -2421,6 +2184,10 @@
             </a:lvl9pPr>
           </a:lstStyle>
           <a:p>
+            <a:r>
+              <a:rPr lang="en-US" smtClean="0"/>
+              <a:t>Click icon to add picture</a:t>
+            </a:r>
             <a:endParaRPr lang="en-US"/>
           </a:p>
         </p:txBody>
@@ -2437,9 +2204,12 @@
         </p:nvSpPr>
         <p:spPr>
           <a:xfrm>
-            <a:off x="1792288" y="5367338"/>
-            <a:ext cx="5486400" cy="804862"/>
+            <a:off x="1971675" y="6083300"/>
+            <a:ext cx="6035675" cy="911225"/>
           </a:xfrm>
+          <a:prstGeom prst="rect">
+            <a:avLst/>
+          </a:prstGeom>
         </p:spPr>
         <p:txBody>
           <a:bodyPr/>
@@ -2490,77 +2260,7 @@
           </a:p>
         </p:txBody>
       </p:sp>
-      <p:sp>
-        <p:nvSpPr>
-          <p:cNvPr id="5" name="Date Placeholder 4"/>
-          <p:cNvSpPr>
-            <a:spLocks noGrp="1"/>
-          </p:cNvSpPr>
-          <p:nvPr>
-            <p:ph type="dt" sz="half" idx="10"/>
-          </p:nvPr>
-        </p:nvSpPr>
-        <p:spPr/>
-        <p:txBody>
-          <a:bodyPr/>
-          <a:lstStyle/>
-          <a:p>
-            <a:fld id="{5BCAD085-E8A6-8845-BD4E-CB4CCA059FC4}" type="datetimeFigureOut">
-              <a:rPr lang="en-US" smtClean="0"/>
-              <a:t>1/27/13</a:t>
-            </a:fld>
-            <a:endParaRPr lang="en-US"/>
-          </a:p>
-        </p:txBody>
-      </p:sp>
-      <p:sp>
-        <p:nvSpPr>
-          <p:cNvPr id="6" name="Footer Placeholder 5"/>
-          <p:cNvSpPr>
-            <a:spLocks noGrp="1"/>
-          </p:cNvSpPr>
-          <p:nvPr>
-            <p:ph type="ftr" sz="quarter" idx="11"/>
-          </p:nvPr>
-        </p:nvSpPr>
-        <p:spPr/>
-        <p:txBody>
-          <a:bodyPr/>
-          <a:lstStyle/>
-          <a:p>
-            <a:endParaRPr lang="en-US"/>
-          </a:p>
-        </p:txBody>
-      </p:sp>
-      <p:sp>
-        <p:nvSpPr>
-          <p:cNvPr id="7" name="Slide Number Placeholder 6"/>
-          <p:cNvSpPr>
-            <a:spLocks noGrp="1"/>
-          </p:cNvSpPr>
-          <p:nvPr>
-            <p:ph type="sldNum" sz="quarter" idx="12"/>
-          </p:nvPr>
-        </p:nvSpPr>
-        <p:spPr/>
-        <p:txBody>
-          <a:bodyPr/>
-          <a:lstStyle/>
-          <a:p>
-            <a:fld id="{C1FF6DA9-008F-8B48-92A6-B652298478BF}" type="slidenum">
-              <a:rPr lang="en-US" smtClean="0"/>
-              <a:t>‹#›</a:t>
-            </a:fld>
-            <a:endParaRPr lang="en-US"/>
-          </a:p>
-        </p:txBody>
-      </p:sp>
     </p:spTree>
-    <p:extLst>
-      <p:ext uri="{BB962C8B-B14F-4D97-AF65-F5344CB8AC3E}">
-        <p14:creationId xmlns:p14="http://schemas.microsoft.com/office/powerpoint/2010/main" val="3889236939"/>
-      </p:ext>
-    </p:extLst>
   </p:cSld>
   <p:clrMapOvr>
     <a:masterClrMapping/>
@@ -2572,9 +2272,12 @@
 <p:sldMaster xmlns:a="http://schemas.openxmlformats.org/drawingml/2006/main" xmlns:r="http://schemas.openxmlformats.org/officeDocument/2006/relationships" xmlns:p="http://schemas.openxmlformats.org/presentationml/2006/main">
   <p:cSld>
     <p:bg>
-      <p:bgRef idx="1001">
-        <a:schemeClr val="bg1"/>
-      </p:bgRef>
+      <p:bgPr>
+        <a:solidFill>
+          <a:schemeClr val="bg1"/>
+        </a:solidFill>
+        <a:effectLst/>
+      </p:bgPr>
     </p:bg>
     <p:spTree>
       <p:nvGrpSpPr>
@@ -2590,226 +2293,33 @@
           <a:chExt cx="0" cy="0"/>
         </a:xfrm>
       </p:grpSpPr>
-      <p:sp>
-        <p:nvSpPr>
-          <p:cNvPr id="2" name="Title Placeholder 1"/>
-          <p:cNvSpPr>
-            <a:spLocks noGrp="1"/>
-          </p:cNvSpPr>
-          <p:nvPr>
-            <p:ph type="title"/>
-          </p:nvPr>
-        </p:nvSpPr>
-        <p:spPr>
+      <p:pic>
+        <p:nvPicPr>
+          <p:cNvPr id="1031" name="Picture 7" descr="MyAwardMaker_ED_008"/>
+          <p:cNvPicPr>
+            <a:picLocks noChangeAspect="1" noChangeArrowheads="1"/>
+          </p:cNvPicPr>
+          <p:nvPr/>
+        </p:nvPicPr>
+        <p:blipFill>
+          <a:blip r:embed="rId13" cstate="print"/>
+          <a:srcRect/>
+          <a:stretch>
+            <a:fillRect/>
+          </a:stretch>
+        </p:blipFill>
+        <p:spPr bwMode="auto">
           <a:xfrm>
-            <a:off x="457200" y="274638"/>
-            <a:ext cx="8229600" cy="1143000"/>
+            <a:off x="457200" y="342900"/>
+            <a:ext cx="9220200" cy="7124700"/>
           </a:xfrm>
           <a:prstGeom prst="rect">
             <a:avLst/>
           </a:prstGeom>
+          <a:noFill/>
         </p:spPr>
-        <p:txBody>
-          <a:bodyPr vert="horz" lIns="91440" tIns="45720" rIns="91440" bIns="45720" rtlCol="0" anchor="ctr">
-            <a:normAutofit/>
-          </a:bodyPr>
-          <a:lstStyle/>
-          <a:p>
-            <a:r>
-              <a:rPr lang="en-US" smtClean="0"/>
-              <a:t>Click to edit Master title style</a:t>
-            </a:r>
-            <a:endParaRPr lang="en-US"/>
-          </a:p>
-        </p:txBody>
-      </p:sp>
-      <p:sp>
-        <p:nvSpPr>
-          <p:cNvPr id="3" name="Text Placeholder 2"/>
-          <p:cNvSpPr>
-            <a:spLocks noGrp="1"/>
-          </p:cNvSpPr>
-          <p:nvPr>
-            <p:ph type="body" idx="1"/>
-          </p:nvPr>
-        </p:nvSpPr>
-        <p:spPr>
-          <a:xfrm>
-            <a:off x="457200" y="1600200"/>
-            <a:ext cx="8229600" cy="4525963"/>
-          </a:xfrm>
-          <a:prstGeom prst="rect">
-            <a:avLst/>
-          </a:prstGeom>
-        </p:spPr>
-        <p:txBody>
-          <a:bodyPr vert="horz" lIns="91440" tIns="45720" rIns="91440" bIns="45720" rtlCol="0">
-            <a:normAutofit/>
-          </a:bodyPr>
-          <a:lstStyle/>
-          <a:p>
-            <a:pPr lvl="0"/>
-            <a:r>
-              <a:rPr lang="en-US" smtClean="0"/>
-              <a:t>Click to edit Master text styles</a:t>
-            </a:r>
-          </a:p>
-          <a:p>
-            <a:pPr lvl="1"/>
-            <a:r>
-              <a:rPr lang="en-US" smtClean="0"/>
-              <a:t>Second level</a:t>
-            </a:r>
-          </a:p>
-          <a:p>
-            <a:pPr lvl="2"/>
-            <a:r>
-              <a:rPr lang="en-US" smtClean="0"/>
-              <a:t>Third level</a:t>
-            </a:r>
-          </a:p>
-          <a:p>
-            <a:pPr lvl="3"/>
-            <a:r>
-              <a:rPr lang="en-US" smtClean="0"/>
-              <a:t>Fourth level</a:t>
-            </a:r>
-          </a:p>
-          <a:p>
-            <a:pPr lvl="4"/>
-            <a:r>
-              <a:rPr lang="en-US" smtClean="0"/>
-              <a:t>Fifth level</a:t>
-            </a:r>
-            <a:endParaRPr lang="en-US"/>
-          </a:p>
-        </p:txBody>
-      </p:sp>
-      <p:sp>
-        <p:nvSpPr>
-          <p:cNvPr id="4" name="Date Placeholder 3"/>
-          <p:cNvSpPr>
-            <a:spLocks noGrp="1"/>
-          </p:cNvSpPr>
-          <p:nvPr>
-            <p:ph type="dt" sz="half" idx="2"/>
-          </p:nvPr>
-        </p:nvSpPr>
-        <p:spPr>
-          <a:xfrm>
-            <a:off x="457200" y="6356350"/>
-            <a:ext cx="2133600" cy="365125"/>
-          </a:xfrm>
-          <a:prstGeom prst="rect">
-            <a:avLst/>
-          </a:prstGeom>
-        </p:spPr>
-        <p:txBody>
-          <a:bodyPr vert="horz" lIns="91440" tIns="45720" rIns="91440" bIns="45720" rtlCol="0" anchor="ctr"/>
-          <a:lstStyle>
-            <a:lvl1pPr algn="l">
-              <a:defRPr sz="1200">
-                <a:solidFill>
-                  <a:schemeClr val="tx1">
-                    <a:tint val="75000"/>
-                  </a:schemeClr>
-                </a:solidFill>
-              </a:defRPr>
-            </a:lvl1pPr>
-          </a:lstStyle>
-          <a:p>
-            <a:fld id="{5BCAD085-E8A6-8845-BD4E-CB4CCA059FC4}" type="datetimeFigureOut">
-              <a:rPr lang="en-US" smtClean="0"/>
-              <a:t>1/27/13</a:t>
-            </a:fld>
-            <a:endParaRPr lang="en-US"/>
-          </a:p>
-        </p:txBody>
-      </p:sp>
-      <p:sp>
-        <p:nvSpPr>
-          <p:cNvPr id="5" name="Footer Placeholder 4"/>
-          <p:cNvSpPr>
-            <a:spLocks noGrp="1"/>
-          </p:cNvSpPr>
-          <p:nvPr>
-            <p:ph type="ftr" sz="quarter" idx="3"/>
-          </p:nvPr>
-        </p:nvSpPr>
-        <p:spPr>
-          <a:xfrm>
-            <a:off x="3124200" y="6356350"/>
-            <a:ext cx="2895600" cy="365125"/>
-          </a:xfrm>
-          <a:prstGeom prst="rect">
-            <a:avLst/>
-          </a:prstGeom>
-        </p:spPr>
-        <p:txBody>
-          <a:bodyPr vert="horz" lIns="91440" tIns="45720" rIns="91440" bIns="45720" rtlCol="0" anchor="ctr"/>
-          <a:lstStyle>
-            <a:lvl1pPr algn="ctr">
-              <a:defRPr sz="1200">
-                <a:solidFill>
-                  <a:schemeClr val="tx1">
-                    <a:tint val="75000"/>
-                  </a:schemeClr>
-                </a:solidFill>
-              </a:defRPr>
-            </a:lvl1pPr>
-          </a:lstStyle>
-          <a:p>
-            <a:endParaRPr lang="en-US"/>
-          </a:p>
-        </p:txBody>
-      </p:sp>
-      <p:sp>
-        <p:nvSpPr>
-          <p:cNvPr id="6" name="Slide Number Placeholder 5"/>
-          <p:cNvSpPr>
-            <a:spLocks noGrp="1"/>
-          </p:cNvSpPr>
-          <p:nvPr>
-            <p:ph type="sldNum" sz="quarter" idx="4"/>
-          </p:nvPr>
-        </p:nvSpPr>
-        <p:spPr>
-          <a:xfrm>
-            <a:off x="6553200" y="6356350"/>
-            <a:ext cx="2133600" cy="365125"/>
-          </a:xfrm>
-          <a:prstGeom prst="rect">
-            <a:avLst/>
-          </a:prstGeom>
-        </p:spPr>
-        <p:txBody>
-          <a:bodyPr vert="horz" lIns="91440" tIns="45720" rIns="91440" bIns="45720" rtlCol="0" anchor="ctr"/>
-          <a:lstStyle>
-            <a:lvl1pPr algn="r">
-              <a:defRPr sz="1200">
-                <a:solidFill>
-                  <a:schemeClr val="tx1">
-                    <a:tint val="75000"/>
-                  </a:schemeClr>
-                </a:solidFill>
-              </a:defRPr>
-            </a:lvl1pPr>
-          </a:lstStyle>
-          <a:p>
-            <a:fld id="{C1FF6DA9-008F-8B48-92A6-B652298478BF}" type="slidenum">
-              <a:rPr lang="en-US" smtClean="0"/>
-              <a:t>‹#›</a:t>
-            </a:fld>
-            <a:endParaRPr lang="en-US"/>
-          </a:p>
-        </p:txBody>
-      </p:sp>
+      </p:pic>
     </p:spTree>
-    <p:extLst>
-      <p:ext uri="{BB962C8B-B14F-4D97-AF65-F5344CB8AC3E}">
-        <p14:creationId xmlns:p14="http://schemas.microsoft.com/office/powerpoint/2010/main" val="2209977519"/>
-      </p:ext>
-    </p:extLst>
   </p:cSld>
   <p:clrMap bg1="lt1" tx1="dk1" bg2="lt2" tx2="dk2" accent1="accent1" accent2="accent2" accent3="accent3" accent4="accent4" accent5="accent5" accent6="accent6" hlink="hlink" folHlink="folHlink"/>
   <p:sldLayoutIdLst>
@@ -2827,29 +2337,145 @@
   </p:sldLayoutIdLst>
   <p:txStyles>
     <p:titleStyle>
-      <a:lvl1pPr algn="ctr" defTabSz="457200" rtl="0" eaLnBrk="1" latinLnBrk="0" hangingPunct="1">
+      <a:lvl1pPr algn="ctr" defTabSz="1019175" rtl="0" eaLnBrk="1" fontAlgn="base" hangingPunct="1">
         <a:spcBef>
           <a:spcPct val="0"/>
         </a:spcBef>
-        <a:buNone/>
-        <a:defRPr sz="4400" kern="1200">
+        <a:spcAft>
+          <a:spcPct val="0"/>
+        </a:spcAft>
+        <a:defRPr sz="4900">
           <a:solidFill>
-            <a:schemeClr val="tx1"/>
+            <a:schemeClr val="tx2"/>
           </a:solidFill>
           <a:latin typeface="+mj-lt"/>
           <a:ea typeface="+mj-ea"/>
           <a:cs typeface="+mj-cs"/>
         </a:defRPr>
       </a:lvl1pPr>
+      <a:lvl2pPr algn="ctr" defTabSz="1019175" rtl="0" eaLnBrk="1" fontAlgn="base" hangingPunct="1">
+        <a:spcBef>
+          <a:spcPct val="0"/>
+        </a:spcBef>
+        <a:spcAft>
+          <a:spcPct val="0"/>
+        </a:spcAft>
+        <a:defRPr sz="4900">
+          <a:solidFill>
+            <a:schemeClr val="tx2"/>
+          </a:solidFill>
+          <a:latin typeface="Arial" charset="0"/>
+        </a:defRPr>
+      </a:lvl2pPr>
+      <a:lvl3pPr algn="ctr" defTabSz="1019175" rtl="0" eaLnBrk="1" fontAlgn="base" hangingPunct="1">
+        <a:spcBef>
+          <a:spcPct val="0"/>
+        </a:spcBef>
+        <a:spcAft>
+          <a:spcPct val="0"/>
+        </a:spcAft>
+        <a:defRPr sz="4900">
+          <a:solidFill>
+            <a:schemeClr val="tx2"/>
+          </a:solidFill>
+          <a:latin typeface="Arial" charset="0"/>
+        </a:defRPr>
+      </a:lvl3pPr>
+      <a:lvl4pPr algn="ctr" defTabSz="1019175" rtl="0" eaLnBrk="1" fontAlgn="base" hangingPunct="1">
+        <a:spcBef>
+          <a:spcPct val="0"/>
+        </a:spcBef>
+        <a:spcAft>
+          <a:spcPct val="0"/>
+        </a:spcAft>
+        <a:defRPr sz="4900">
+          <a:solidFill>
+            <a:schemeClr val="tx2"/>
+          </a:solidFill>
+          <a:latin typeface="Arial" charset="0"/>
+        </a:defRPr>
+      </a:lvl4pPr>
+      <a:lvl5pPr algn="ctr" defTabSz="1019175" rtl="0" eaLnBrk="1" fontAlgn="base" hangingPunct="1">
+        <a:spcBef>
+          <a:spcPct val="0"/>
+        </a:spcBef>
+        <a:spcAft>
+          <a:spcPct val="0"/>
+        </a:spcAft>
+        <a:defRPr sz="4900">
+          <a:solidFill>
+            <a:schemeClr val="tx2"/>
+          </a:solidFill>
+          <a:latin typeface="Arial" charset="0"/>
+        </a:defRPr>
+      </a:lvl5pPr>
+      <a:lvl6pPr marL="457200" algn="ctr" defTabSz="1019175" rtl="0" eaLnBrk="1" fontAlgn="base" hangingPunct="1">
+        <a:spcBef>
+          <a:spcPct val="0"/>
+        </a:spcBef>
+        <a:spcAft>
+          <a:spcPct val="0"/>
+        </a:spcAft>
+        <a:defRPr sz="4900">
+          <a:solidFill>
+            <a:schemeClr val="tx2"/>
+          </a:solidFill>
+          <a:latin typeface="Arial" charset="0"/>
+        </a:defRPr>
+      </a:lvl6pPr>
+      <a:lvl7pPr marL="914400" algn="ctr" defTabSz="1019175" rtl="0" eaLnBrk="1" fontAlgn="base" hangingPunct="1">
+        <a:spcBef>
+          <a:spcPct val="0"/>
+        </a:spcBef>
+        <a:spcAft>
+          <a:spcPct val="0"/>
+        </a:spcAft>
+        <a:defRPr sz="4900">
+          <a:solidFill>
+            <a:schemeClr val="tx2"/>
+          </a:solidFill>
+          <a:latin typeface="Arial" charset="0"/>
+        </a:defRPr>
+      </a:lvl7pPr>
+      <a:lvl8pPr marL="1371600" algn="ctr" defTabSz="1019175" rtl="0" eaLnBrk="1" fontAlgn="base" hangingPunct="1">
+        <a:spcBef>
+          <a:spcPct val="0"/>
+        </a:spcBef>
+        <a:spcAft>
+          <a:spcPct val="0"/>
+        </a:spcAft>
+        <a:defRPr sz="4900">
+          <a:solidFill>
+            <a:schemeClr val="tx2"/>
+          </a:solidFill>
+          <a:latin typeface="Arial" charset="0"/>
+        </a:defRPr>
+      </a:lvl8pPr>
+      <a:lvl9pPr marL="1828800" algn="ctr" defTabSz="1019175" rtl="0" eaLnBrk="1" fontAlgn="base" hangingPunct="1">
+        <a:spcBef>
+          <a:spcPct val="0"/>
+        </a:spcBef>
+        <a:spcAft>
+          <a:spcPct val="0"/>
+        </a:spcAft>
+        <a:defRPr sz="4900">
+          <a:solidFill>
+            <a:schemeClr val="tx2"/>
+          </a:solidFill>
+          <a:latin typeface="Arial" charset="0"/>
+        </a:defRPr>
+      </a:lvl9pPr>
     </p:titleStyle>
     <p:bodyStyle>
-      <a:lvl1pPr marL="342900" indent="-342900" algn="l" defTabSz="457200" rtl="0" eaLnBrk="1" latinLnBrk="0" hangingPunct="1">
+      <a:lvl1pPr marL="382588" indent="-382588" algn="l" defTabSz="1019175" rtl="0" eaLnBrk="1" fontAlgn="base" hangingPunct="1">
         <a:spcBef>
           <a:spcPct val="20000"/>
         </a:spcBef>
-        <a:buFont typeface="Arial"/>
+        <a:spcAft>
+          <a:spcPct val="0"/>
+        </a:spcAft>
         <a:buChar char="•"/>
-        <a:defRPr sz="3200" kern="1200">
+        <a:defRPr sz="3600">
           <a:solidFill>
             <a:schemeClr val="tx1"/>
           </a:solidFill>
@@ -2858,124 +2484,124 @@
           <a:cs typeface="+mn-cs"/>
         </a:defRPr>
       </a:lvl1pPr>
-      <a:lvl2pPr marL="742950" indent="-285750" algn="l" defTabSz="457200" rtl="0" eaLnBrk="1" latinLnBrk="0" hangingPunct="1">
+      <a:lvl2pPr marL="827088" indent="-317500" algn="l" defTabSz="1019175" rtl="0" eaLnBrk="1" fontAlgn="base" hangingPunct="1">
         <a:spcBef>
           <a:spcPct val="20000"/>
         </a:spcBef>
-        <a:buFont typeface="Arial"/>
+        <a:spcAft>
+          <a:spcPct val="0"/>
+        </a:spcAft>
         <a:buChar char="–"/>
-        <a:defRPr sz="2800" kern="1200">
+        <a:defRPr sz="3100">
           <a:solidFill>
             <a:schemeClr val="tx1"/>
           </a:solidFill>
           <a:latin typeface="+mn-lt"/>
-          <a:ea typeface="+mn-ea"/>
-          <a:cs typeface="+mn-cs"/>
         </a:defRPr>
       </a:lvl2pPr>
-      <a:lvl3pPr marL="1143000" indent="-228600" algn="l" defTabSz="457200" rtl="0" eaLnBrk="1" latinLnBrk="0" hangingPunct="1">
+      <a:lvl3pPr marL="1273175" indent="-254000" algn="l" defTabSz="1019175" rtl="0" eaLnBrk="1" fontAlgn="base" hangingPunct="1">
         <a:spcBef>
           <a:spcPct val="20000"/>
         </a:spcBef>
-        <a:buFont typeface="Arial"/>
+        <a:spcAft>
+          <a:spcPct val="0"/>
+        </a:spcAft>
         <a:buChar char="•"/>
-        <a:defRPr sz="2400" kern="1200">
+        <a:defRPr sz="2700">
           <a:solidFill>
             <a:schemeClr val="tx1"/>
           </a:solidFill>
           <a:latin typeface="+mn-lt"/>
-          <a:ea typeface="+mn-ea"/>
-          <a:cs typeface="+mn-cs"/>
         </a:defRPr>
       </a:lvl3pPr>
-      <a:lvl4pPr marL="1600200" indent="-228600" algn="l" defTabSz="457200" rtl="0" eaLnBrk="1" latinLnBrk="0" hangingPunct="1">
+      <a:lvl4pPr marL="1782763" indent="-254000" algn="l" defTabSz="1019175" rtl="0" eaLnBrk="1" fontAlgn="base" hangingPunct="1">
         <a:spcBef>
           <a:spcPct val="20000"/>
         </a:spcBef>
-        <a:buFont typeface="Arial"/>
+        <a:spcAft>
+          <a:spcPct val="0"/>
+        </a:spcAft>
         <a:buChar char="–"/>
-        <a:defRPr sz="2000" kern="1200">
+        <a:defRPr sz="2200">
           <a:solidFill>
             <a:schemeClr val="tx1"/>
           </a:solidFill>
           <a:latin typeface="+mn-lt"/>
-          <a:ea typeface="+mn-ea"/>
-          <a:cs typeface="+mn-cs"/>
         </a:defRPr>
       </a:lvl4pPr>
-      <a:lvl5pPr marL="2057400" indent="-228600" algn="l" defTabSz="457200" rtl="0" eaLnBrk="1" latinLnBrk="0" hangingPunct="1">
+      <a:lvl5pPr marL="2292350" indent="-254000" algn="l" defTabSz="1019175" rtl="0" eaLnBrk="1" fontAlgn="base" hangingPunct="1">
         <a:spcBef>
           <a:spcPct val="20000"/>
         </a:spcBef>
-        <a:buFont typeface="Arial"/>
+        <a:spcAft>
+          <a:spcPct val="0"/>
+        </a:spcAft>
         <a:buChar char="»"/>
-        <a:defRPr sz="2000" kern="1200">
+        <a:defRPr sz="2200">
           <a:solidFill>
             <a:schemeClr val="tx1"/>
           </a:solidFill>
           <a:latin typeface="+mn-lt"/>
-          <a:ea typeface="+mn-ea"/>
-          <a:cs typeface="+mn-cs"/>
         </a:defRPr>
       </a:lvl5pPr>
-      <a:lvl6pPr marL="2514600" indent="-228600" algn="l" defTabSz="457200" rtl="0" eaLnBrk="1" latinLnBrk="0" hangingPunct="1">
+      <a:lvl6pPr marL="2749550" indent="-254000" algn="l" defTabSz="1019175" rtl="0" eaLnBrk="1" fontAlgn="base" hangingPunct="1">
         <a:spcBef>
           <a:spcPct val="20000"/>
         </a:spcBef>
-        <a:buFont typeface="Arial"/>
-        <a:buChar char="•"/>
-        <a:defRPr sz="2000" kern="1200">
+        <a:spcAft>
+          <a:spcPct val="0"/>
+        </a:spcAft>
+        <a:buChar char="»"/>
+        <a:defRPr sz="2200">
           <a:solidFill>
             <a:schemeClr val="tx1"/>
           </a:solidFill>
           <a:latin typeface="+mn-lt"/>
-          <a:ea typeface="+mn-ea"/>
-          <a:cs typeface="+mn-cs"/>
         </a:defRPr>
       </a:lvl6pPr>
-      <a:lvl7pPr marL="2971800" indent="-228600" algn="l" defTabSz="457200" rtl="0" eaLnBrk="1" latinLnBrk="0" hangingPunct="1">
+      <a:lvl7pPr marL="3206750" indent="-254000" algn="l" defTabSz="1019175" rtl="0" eaLnBrk="1" fontAlgn="base" hangingPunct="1">
         <a:spcBef>
           <a:spcPct val="20000"/>
         </a:spcBef>
-        <a:buFont typeface="Arial"/>
-        <a:buChar char="•"/>
-        <a:defRPr sz="2000" kern="1200">
+        <a:spcAft>
+          <a:spcPct val="0"/>
+        </a:spcAft>
+        <a:buChar char="»"/>
+        <a:defRPr sz="2200">
           <a:solidFill>
             <a:schemeClr val="tx1"/>
           </a:solidFill>
           <a:latin typeface="+mn-lt"/>
-          <a:ea typeface="+mn-ea"/>
-          <a:cs typeface="+mn-cs"/>
         </a:defRPr>
       </a:lvl7pPr>
-      <a:lvl8pPr marL="3429000" indent="-228600" algn="l" defTabSz="457200" rtl="0" eaLnBrk="1" latinLnBrk="0" hangingPunct="1">
+      <a:lvl8pPr marL="3663950" indent="-254000" algn="l" defTabSz="1019175" rtl="0" eaLnBrk="1" fontAlgn="base" hangingPunct="1">
         <a:spcBef>
           <a:spcPct val="20000"/>
         </a:spcBef>
-        <a:buFont typeface="Arial"/>
-        <a:buChar char="•"/>
-        <a:defRPr sz="2000" kern="1200">
+        <a:spcAft>
+          <a:spcPct val="0"/>
+        </a:spcAft>
+        <a:buChar char="»"/>
+        <a:defRPr sz="2200">
           <a:solidFill>
             <a:schemeClr val="tx1"/>
           </a:solidFill>
           <a:latin typeface="+mn-lt"/>
-          <a:ea typeface="+mn-ea"/>
-          <a:cs typeface="+mn-cs"/>
         </a:defRPr>
       </a:lvl8pPr>
-      <a:lvl9pPr marL="3886200" indent="-228600" algn="l" defTabSz="457200" rtl="0" eaLnBrk="1" latinLnBrk="0" hangingPunct="1">
+      <a:lvl9pPr marL="4121150" indent="-254000" algn="l" defTabSz="1019175" rtl="0" eaLnBrk="1" fontAlgn="base" hangingPunct="1">
         <a:spcBef>
           <a:spcPct val="20000"/>
         </a:spcBef>
-        <a:buFont typeface="Arial"/>
-        <a:buChar char="•"/>
-        <a:defRPr sz="2000" kern="1200">
+        <a:spcAft>
+          <a:spcPct val="0"/>
+        </a:spcAft>
+        <a:buChar char="»"/>
+        <a:defRPr sz="2200">
           <a:solidFill>
             <a:schemeClr val="tx1"/>
           </a:solidFill>
           <a:latin typeface="+mn-lt"/>
-          <a:ea typeface="+mn-ea"/>
-          <a:cs typeface="+mn-cs"/>
         </a:defRPr>
       </a:lvl9pPr>
     </p:bodyStyle>
@@ -2983,7 +2609,7 @@
       <a:defPPr>
         <a:defRPr lang="en-US"/>
       </a:defPPr>
-      <a:lvl1pPr marL="0" algn="l" defTabSz="457200" rtl="0" eaLnBrk="1" latinLnBrk="0" hangingPunct="1">
+      <a:lvl1pPr marL="0" algn="l" defTabSz="914400" rtl="0" eaLnBrk="1" latinLnBrk="0" hangingPunct="1">
         <a:defRPr sz="1800" kern="1200">
           <a:solidFill>
             <a:schemeClr val="tx1"/>
@@ -2993,7 +2619,7 @@
           <a:cs typeface="+mn-cs"/>
         </a:defRPr>
       </a:lvl1pPr>
-      <a:lvl2pPr marL="457200" algn="l" defTabSz="457200" rtl="0" eaLnBrk="1" latinLnBrk="0" hangingPunct="1">
+      <a:lvl2pPr marL="457200" algn="l" defTabSz="914400" rtl="0" eaLnBrk="1" latinLnBrk="0" hangingPunct="1">
         <a:defRPr sz="1800" kern="1200">
           <a:solidFill>
             <a:schemeClr val="tx1"/>
@@ -3003,7 +2629,7 @@
           <a:cs typeface="+mn-cs"/>
         </a:defRPr>
       </a:lvl2pPr>
-      <a:lvl3pPr marL="914400" algn="l" defTabSz="457200" rtl="0" eaLnBrk="1" latinLnBrk="0" hangingPunct="1">
+      <a:lvl3pPr marL="914400" algn="l" defTabSz="914400" rtl="0" eaLnBrk="1" latinLnBrk="0" hangingPunct="1">
         <a:defRPr sz="1800" kern="1200">
           <a:solidFill>
             <a:schemeClr val="tx1"/>
@@ -3013,7 +2639,7 @@
           <a:cs typeface="+mn-cs"/>
         </a:defRPr>
       </a:lvl3pPr>
-      <a:lvl4pPr marL="1371600" algn="l" defTabSz="457200" rtl="0" eaLnBrk="1" latinLnBrk="0" hangingPunct="1">
+      <a:lvl4pPr marL="1371600" algn="l" defTabSz="914400" rtl="0" eaLnBrk="1" latinLnBrk="0" hangingPunct="1">
         <a:defRPr sz="1800" kern="1200">
           <a:solidFill>
             <a:schemeClr val="tx1"/>
@@ -3023,7 +2649,7 @@
           <a:cs typeface="+mn-cs"/>
         </a:defRPr>
       </a:lvl4pPr>
-      <a:lvl5pPr marL="1828800" algn="l" defTabSz="457200" rtl="0" eaLnBrk="1" latinLnBrk="0" hangingPunct="1">
+      <a:lvl5pPr marL="1828800" algn="l" defTabSz="914400" rtl="0" eaLnBrk="1" latinLnBrk="0" hangingPunct="1">
         <a:defRPr sz="1800" kern="1200">
           <a:solidFill>
             <a:schemeClr val="tx1"/>
@@ -3033,7 +2659,7 @@
           <a:cs typeface="+mn-cs"/>
         </a:defRPr>
       </a:lvl5pPr>
-      <a:lvl6pPr marL="2286000" algn="l" defTabSz="457200" rtl="0" eaLnBrk="1" latinLnBrk="0" hangingPunct="1">
+      <a:lvl6pPr marL="2286000" algn="l" defTabSz="914400" rtl="0" eaLnBrk="1" latinLnBrk="0" hangingPunct="1">
         <a:defRPr sz="1800" kern="1200">
           <a:solidFill>
             <a:schemeClr val="tx1"/>
@@ -3043,7 +2669,7 @@
           <a:cs typeface="+mn-cs"/>
         </a:defRPr>
       </a:lvl6pPr>
-      <a:lvl7pPr marL="2743200" algn="l" defTabSz="457200" rtl="0" eaLnBrk="1" latinLnBrk="0" hangingPunct="1">
+      <a:lvl7pPr marL="2743200" algn="l" defTabSz="914400" rtl="0" eaLnBrk="1" latinLnBrk="0" hangingPunct="1">
         <a:defRPr sz="1800" kern="1200">
           <a:solidFill>
             <a:schemeClr val="tx1"/>
@@ -3053,7 +2679,7 @@
           <a:cs typeface="+mn-cs"/>
         </a:defRPr>
       </a:lvl7pPr>
-      <a:lvl8pPr marL="3200400" algn="l" defTabSz="457200" rtl="0" eaLnBrk="1" latinLnBrk="0" hangingPunct="1">
+      <a:lvl8pPr marL="3200400" algn="l" defTabSz="914400" rtl="0" eaLnBrk="1" latinLnBrk="0" hangingPunct="1">
         <a:defRPr sz="1800" kern="1200">
           <a:solidFill>
             <a:schemeClr val="tx1"/>
@@ -3063,7 +2689,7 @@
           <a:cs typeface="+mn-cs"/>
         </a:defRPr>
       </a:lvl8pPr>
-      <a:lvl9pPr marL="3657600" algn="l" defTabSz="457200" rtl="0" eaLnBrk="1" latinLnBrk="0" hangingPunct="1">
+      <a:lvl9pPr marL="3657600" algn="l" defTabSz="914400" rtl="0" eaLnBrk="1" latinLnBrk="0" hangingPunct="1">
         <a:defRPr sz="1800" kern="1200">
           <a:solidFill>
             <a:schemeClr val="tx1"/>
@@ -3088,102 +2714,43 @@
         <p:nvPr/>
       </p:nvGrpSpPr>
       <p:grpSpPr/>
-      <p:pic>
-        <p:nvPicPr>
-          <p:cNvPr id="2" name="Picture 1" descr="image1.jpeg"/>
-          <p:cNvPicPr>
-            <a:picLocks noChangeAspect="1"/>
-          </p:cNvPicPr>
-          <p:nvPr/>
-        </p:nvPicPr>
-        <p:blipFill>
-          <a:blip r:embed="rId2"/>
-          <a:stretch>
-            <a:fillRect/>
-          </a:stretch>
-        </p:blipFill>
-        <p:spPr>
-          <a:xfrm>
-            <a:off x="457200" y="342900"/>
-            <a:ext cx="9220200" cy="7124700"/>
-          </a:xfrm>
-          <a:prstGeom prst="rect">
-            <a:avLst/>
-          </a:prstGeom>
-        </p:spPr>
-      </p:pic>
       <p:sp>
         <p:nvSpPr>
-          <p:cNvPr id="3" name="Rectangle 2"/>
-          <p:cNvSpPr/>
-          <p:nvPr/>
+          <p:cNvPr id="2" name="Title 1"/>
+          <p:cNvSpPr>
+            <a:spLocks noGrp="1"/>
+          </p:cNvSpPr>
+          <p:nvPr>
+            <p:ph type="ctrTitle"/>
+          </p:nvPr>
         </p:nvSpPr>
-        <p:spPr>
-          <a:xfrm>
-            <a:off x="1828800" y="2362200"/>
-            <a:ext cx="6492875" cy="685800"/>
-          </a:xfrm>
-          <a:prstGeom prst="rect">
-            <a:avLst/>
-          </a:prstGeom>
-        </p:spPr>
-        <p:style>
-          <a:lnRef idx="1">
-            <a:schemeClr val="accent1"/>
-          </a:lnRef>
-          <a:fillRef idx="3">
-            <a:schemeClr val="accent1"/>
-          </a:fillRef>
-          <a:effectRef idx="2">
-            <a:schemeClr val="accent1"/>
-          </a:effectRef>
-          <a:fontRef idx="minor">
-            <a:schemeClr val="lt1"/>
-          </a:fontRef>
-        </p:style>
+        <p:spPr/>
         <p:txBody>
-          <a:bodyPr rtlCol="0" anchor="ctr"/>
+          <a:bodyPr/>
           <a:lstStyle/>
-          <a:p>
-            <a:pPr algn="ctr"/>
-          </a:p>
+          <a:p/>
         </p:txBody>
       </p:sp>
       <p:sp>
         <p:nvSpPr>
-          <p:cNvPr id="4" name="Rectangle 3"/>
-          <p:cNvSpPr/>
-          <p:nvPr/>
+          <p:cNvPr id="3" name="Subtitle 2"/>
+          <p:cNvSpPr>
+            <a:spLocks noGrp="1"/>
+          </p:cNvSpPr>
+          <p:nvPr>
+            <p:ph type="subTitle" idx="1"/>
+          </p:nvPr>
         </p:nvSpPr>
         <p:spPr>
           <a:xfrm>
-            <a:off x="2286000" y="3651250"/>
-            <a:ext cx="5670550" cy="1225550"/>
+            <a:off x="2286000" y="3651291"/>
+            <a:ext cx="5670560" cy="1225570"/>
           </a:xfrm>
-          <a:prstGeom prst="rect">
-            <a:avLst/>
-          </a:prstGeom>
         </p:spPr>
-        <p:style>
-          <a:lnRef idx="1">
-            <a:schemeClr val="accent1"/>
-          </a:lnRef>
-          <a:fillRef idx="3">
-            <a:schemeClr val="accent1"/>
-          </a:fillRef>
-          <a:effectRef idx="2">
-            <a:schemeClr val="accent1"/>
-          </a:effectRef>
-          <a:fontRef idx="minor">
-            <a:schemeClr val="lt1"/>
-          </a:fontRef>
-        </p:style>
         <p:txBody>
-          <a:bodyPr rtlCol="0" anchor="ctr"/>
+          <a:bodyPr/>
           <a:lstStyle/>
-          <a:p>
-            <a:pPr algn="ctr"/>
-          </a:p>
+          <a:p/>
         </p:txBody>
       </p:sp>
     </p:spTree>
@@ -3195,116 +2762,56 @@
 </file>
 
 <file path=ppt/theme/theme1.xml><?xml version="1.0" encoding="utf-8"?>
-<a:theme xmlns:a="http://schemas.openxmlformats.org/drawingml/2006/main" name="Office Theme">
+<a:theme xmlns:a="http://schemas.openxmlformats.org/drawingml/2006/main" name="Soccer achievement award certificate">
   <a:themeElements>
-    <a:clrScheme name="Office">
+    <a:clrScheme name="Office Theme 1">
       <a:dk1>
-        <a:sysClr val="windowText" lastClr="000000"/>
+        <a:srgbClr val="000000"/>
       </a:dk1>
       <a:lt1>
-        <a:sysClr val="window" lastClr="FFFFFF"/>
+        <a:srgbClr val="FFFFFF"/>
       </a:lt1>
       <a:dk2>
-        <a:srgbClr val="1F497D"/>
+        <a:srgbClr val="000000"/>
       </a:dk2>
       <a:lt2>
-        <a:srgbClr val="EEECE1"/>
+        <a:srgbClr val="808080"/>
       </a:lt2>
       <a:accent1>
-        <a:srgbClr val="4F81BD"/>
+        <a:srgbClr val="BBE0E3"/>
       </a:accent1>
       <a:accent2>
-        <a:srgbClr val="C0504D"/>
+        <a:srgbClr val="333399"/>
       </a:accent2>
       <a:accent3>
-        <a:srgbClr val="9BBB59"/>
+        <a:srgbClr val="FFFFFF"/>
       </a:accent3>
       <a:accent4>
-        <a:srgbClr val="8064A2"/>
+        <a:srgbClr val="000000"/>
       </a:accent4>
       <a:accent5>
-        <a:srgbClr val="4BACC6"/>
+        <a:srgbClr val="DAEDEF"/>
       </a:accent5>
       <a:accent6>
-        <a:srgbClr val="F79646"/>
+        <a:srgbClr val="2D2D8A"/>
       </a:accent6>
       <a:hlink>
-        <a:srgbClr val="0000FF"/>
+        <a:srgbClr val="009999"/>
       </a:hlink>
       <a:folHlink>
-        <a:srgbClr val="800080"/>
+        <a:srgbClr val="99CC00"/>
       </a:folHlink>
     </a:clrScheme>
-    <a:fontScheme name="Office">
+    <a:fontScheme name="Office Theme">
       <a:majorFont>
-        <a:latin typeface="Calibri"/>
+        <a:latin typeface="Arial"/>
         <a:ea typeface=""/>
         <a:cs typeface=""/>
-        <a:font script="Jpan" typeface="ＭＳ Ｐゴシック"/>
-        <a:font script="Hang" typeface="맑은 고딕"/>
-        <a:font script="Hans" typeface="宋体"/>
-        <a:font script="Hant" typeface="新細明體"/>
-        <a:font script="Arab" typeface="Times New Roman"/>
-        <a:font script="Hebr" typeface="Times New Roman"/>
-        <a:font script="Thai" typeface="Angsana New"/>
-        <a:font script="Ethi" typeface="Nyala"/>
-        <a:font script="Beng" typeface="Vrinda"/>
-        <a:font script="Gujr" typeface="Shruti"/>
-        <a:font script="Khmr" typeface="MoolBoran"/>
-        <a:font script="Knda" typeface="Tunga"/>
-        <a:font script="Guru" typeface="Raavi"/>
-        <a:font script="Cans" typeface="Euphemia"/>
-        <a:font script="Cher" typeface="Plantagenet Cherokee"/>
-        <a:font script="Yiii" typeface="Microsoft Yi Baiti"/>
-        <a:font script="Tibt" typeface="Microsoft Himalaya"/>
-        <a:font script="Thaa" typeface="MV Boli"/>
-        <a:font script="Deva" typeface="Mangal"/>
-        <a:font script="Telu" typeface="Gautami"/>
-        <a:font script="Taml" typeface="Latha"/>
-        <a:font script="Syrc" typeface="Estrangelo Edessa"/>
-        <a:font script="Orya" typeface="Kalinga"/>
-        <a:font script="Mlym" typeface="Kartika"/>
-        <a:font script="Laoo" typeface="DokChampa"/>
-        <a:font script="Sinh" typeface="Iskoola Pota"/>
-        <a:font script="Mong" typeface="Mongolian Baiti"/>
-        <a:font script="Viet" typeface="Times New Roman"/>
-        <a:font script="Uigh" typeface="Microsoft Uighur"/>
-        <a:font script="Geor" typeface="Sylfaen"/>
       </a:majorFont>
       <a:minorFont>
-        <a:latin typeface="Calibri"/>
+        <a:latin typeface="Arial"/>
         <a:ea typeface=""/>
         <a:cs typeface=""/>
-        <a:font script="Jpan" typeface="ＭＳ Ｐゴシック"/>
-        <a:font script="Hang" typeface="맑은 고딕"/>
-        <a:font script="Hans" typeface="宋体"/>
-        <a:font script="Hant" typeface="新細明體"/>
-        <a:font script="Arab" typeface="Arial"/>
-        <a:font script="Hebr" typeface="Arial"/>
-        <a:font script="Thai" typeface="Cordia New"/>
-        <a:font script="Ethi" typeface="Nyala"/>
-        <a:font script="Beng" typeface="Vrinda"/>
-        <a:font script="Gujr" typeface="Shruti"/>
-        <a:font script="Khmr" typeface="DaunPenh"/>
-        <a:font script="Knda" typeface="Tunga"/>
-        <a:font script="Guru" typeface="Raavi"/>
-        <a:font script="Cans" typeface="Euphemia"/>
-        <a:font script="Cher" typeface="Plantagenet Cherokee"/>
-        <a:font script="Yiii" typeface="Microsoft Yi Baiti"/>
-        <a:font script="Tibt" typeface="Microsoft Himalaya"/>
-        <a:font script="Thaa" typeface="MV Boli"/>
-        <a:font script="Deva" typeface="Mangal"/>
-        <a:font script="Telu" typeface="Gautami"/>
-        <a:font script="Taml" typeface="Latha"/>
-        <a:font script="Syrc" typeface="Estrangelo Edessa"/>
-        <a:font script="Orya" typeface="Kalinga"/>
-        <a:font script="Mlym" typeface="Kartika"/>
-        <a:font script="Laoo" typeface="DokChampa"/>
-        <a:font script="Sinh" typeface="Iskoola Pota"/>
-        <a:font script="Mong" typeface="Mongolian Baiti"/>
-        <a:font script="Viet" typeface="Arial"/>
-        <a:font script="Uigh" typeface="Microsoft Uighur"/>
-        <a:font script="Geor" typeface="Sylfaen"/>
       </a:minorFont>
     </a:fontScheme>
     <a:fmtScheme name="Office">
@@ -3339,16 +2846,20 @@
           <a:gsLst>
             <a:gs pos="0">
               <a:schemeClr val="phClr">
-                <a:tint val="100000"/>
-                <a:shade val="100000"/>
+                <a:shade val="51000"/>
+                <a:satMod val="130000"/>
+              </a:schemeClr>
+            </a:gs>
+            <a:gs pos="80000">
+              <a:schemeClr val="phClr">
+                <a:shade val="93000"/>
                 <a:satMod val="130000"/>
               </a:schemeClr>
             </a:gs>
             <a:gs pos="100000">
               <a:schemeClr val="phClr">
-                <a:tint val="50000"/>
-                <a:shade val="100000"/>
-                <a:satMod val="350000"/>
+                <a:shade val="94000"/>
+                <a:satMod val="135000"/>
               </a:schemeClr>
             </a:gs>
           </a:gsLst>
@@ -3472,44 +2983,906 @@
   </a:themeElements>
   <a:objectDefaults>
     <a:spDef>
-      <a:spPr/>
-      <a:bodyPr/>
-      <a:lstStyle/>
-      <a:style>
-        <a:lnRef idx="1">
+      <a:spPr bwMode="auto">
+        <a:xfrm>
+          <a:off x="0" y="0"/>
+          <a:ext cx="1" cy="1"/>
+        </a:xfrm>
+        <a:custGeom>
+          <a:avLst/>
+          <a:gdLst/>
+          <a:ahLst/>
+          <a:cxnLst/>
+          <a:rect l="0" t="0" r="0" b="0"/>
+          <a:pathLst/>
+        </a:custGeom>
+        <a:solidFill>
           <a:schemeClr val="accent1"/>
-        </a:lnRef>
-        <a:fillRef idx="3">
-          <a:schemeClr val="accent1"/>
-        </a:fillRef>
-        <a:effectRef idx="2">
-          <a:schemeClr val="accent1"/>
-        </a:effectRef>
-        <a:fontRef idx="minor">
-          <a:schemeClr val="lt1"/>
-        </a:fontRef>
-      </a:style>
+        </a:solidFill>
+        <a:ln w="9525" cap="flat" cmpd="sng" algn="ctr">
+          <a:solidFill>
+            <a:schemeClr val="tx1"/>
+          </a:solidFill>
+          <a:prstDash val="solid"/>
+          <a:round/>
+          <a:headEnd type="none" w="med" len="med"/>
+          <a:tailEnd type="none" w="med" len="med"/>
+        </a:ln>
+        <a:effectLst/>
+      </a:spPr>
+      <a:bodyPr vert="horz" wrap="square" lIns="91440" tIns="45720" rIns="91440" bIns="45720" numCol="1" anchor="t" anchorCtr="0" compatLnSpc="1">
+        <a:prstTxWarp prst="textNoShape">
+          <a:avLst/>
+        </a:prstTxWarp>
+      </a:bodyPr>
+      <a:lstStyle>
+        <a:defPPr marL="0" marR="0" indent="0" algn="l" defTabSz="1019175" rtl="0" eaLnBrk="1" fontAlgn="base" latinLnBrk="0" hangingPunct="1">
+          <a:lnSpc>
+            <a:spcPct val="100000"/>
+          </a:lnSpc>
+          <a:spcBef>
+            <a:spcPct val="0"/>
+          </a:spcBef>
+          <a:spcAft>
+            <a:spcPct val="0"/>
+          </a:spcAft>
+          <a:buClrTx/>
+          <a:buSzTx/>
+          <a:buFontTx/>
+          <a:buNone/>
+          <a:tabLst/>
+          <a:defRPr kumimoji="0" lang="en-US" sz="2000" b="0" i="0" u="none" strike="noStrike" cap="none" normalizeH="0" baseline="0" smtClean="0">
+            <a:ln>
+              <a:noFill/>
+            </a:ln>
+            <a:solidFill>
+              <a:schemeClr val="tx1"/>
+            </a:solidFill>
+            <a:effectLst/>
+            <a:latin typeface="Arial" charset="0"/>
+          </a:defRPr>
+        </a:defPPr>
+      </a:lstStyle>
     </a:spDef>
     <a:lnDef>
-      <a:spPr/>
-      <a:bodyPr/>
-      <a:lstStyle/>
-      <a:style>
-        <a:lnRef idx="2">
+      <a:spPr bwMode="auto">
+        <a:xfrm>
+          <a:off x="0" y="0"/>
+          <a:ext cx="1" cy="1"/>
+        </a:xfrm>
+        <a:custGeom>
+          <a:avLst/>
+          <a:gdLst/>
+          <a:ahLst/>
+          <a:cxnLst/>
+          <a:rect l="0" t="0" r="0" b="0"/>
+          <a:pathLst/>
+        </a:custGeom>
+        <a:solidFill>
           <a:schemeClr val="accent1"/>
-        </a:lnRef>
-        <a:fillRef idx="0">
-          <a:schemeClr val="accent1"/>
-        </a:fillRef>
-        <a:effectRef idx="1">
-          <a:schemeClr val="accent1"/>
-        </a:effectRef>
-        <a:fontRef idx="minor">
-          <a:schemeClr val="tx1"/>
-        </a:fontRef>
-      </a:style>
+        </a:solidFill>
+        <a:ln w="9525" cap="flat" cmpd="sng" algn="ctr">
+          <a:solidFill>
+            <a:schemeClr val="tx1"/>
+          </a:solidFill>
+          <a:prstDash val="solid"/>
+          <a:round/>
+          <a:headEnd type="none" w="med" len="med"/>
+          <a:tailEnd type="none" w="med" len="med"/>
+        </a:ln>
+        <a:effectLst/>
+      </a:spPr>
+      <a:bodyPr vert="horz" wrap="square" lIns="91440" tIns="45720" rIns="91440" bIns="45720" numCol="1" anchor="t" anchorCtr="0" compatLnSpc="1">
+        <a:prstTxWarp prst="textNoShape">
+          <a:avLst/>
+        </a:prstTxWarp>
+      </a:bodyPr>
+      <a:lstStyle>
+        <a:defPPr marL="0" marR="0" indent="0" algn="l" defTabSz="1019175" rtl="0" eaLnBrk="1" fontAlgn="base" latinLnBrk="0" hangingPunct="1">
+          <a:lnSpc>
+            <a:spcPct val="100000"/>
+          </a:lnSpc>
+          <a:spcBef>
+            <a:spcPct val="0"/>
+          </a:spcBef>
+          <a:spcAft>
+            <a:spcPct val="0"/>
+          </a:spcAft>
+          <a:buClrTx/>
+          <a:buSzTx/>
+          <a:buFontTx/>
+          <a:buNone/>
+          <a:tabLst/>
+          <a:defRPr kumimoji="0" lang="en-US" sz="2000" b="0" i="0" u="none" strike="noStrike" cap="none" normalizeH="0" baseline="0" smtClean="0">
+            <a:ln>
+              <a:noFill/>
+            </a:ln>
+            <a:solidFill>
+              <a:schemeClr val="tx1"/>
+            </a:solidFill>
+            <a:effectLst/>
+            <a:latin typeface="Arial" charset="0"/>
+          </a:defRPr>
+        </a:defPPr>
+      </a:lstStyle>
     </a:lnDef>
   </a:objectDefaults>
+  <a:extraClrSchemeLst>
+    <a:extraClrScheme>
+      <a:clrScheme name="Office Theme 1">
+        <a:dk1>
+          <a:srgbClr val="000000"/>
+        </a:dk1>
+        <a:lt1>
+          <a:srgbClr val="FFFFFF"/>
+        </a:lt1>
+        <a:dk2>
+          <a:srgbClr val="000000"/>
+        </a:dk2>
+        <a:lt2>
+          <a:srgbClr val="808080"/>
+        </a:lt2>
+        <a:accent1>
+          <a:srgbClr val="BBE0E3"/>
+        </a:accent1>
+        <a:accent2>
+          <a:srgbClr val="333399"/>
+        </a:accent2>
+        <a:accent3>
+          <a:srgbClr val="FFFFFF"/>
+        </a:accent3>
+        <a:accent4>
+          <a:srgbClr val="000000"/>
+        </a:accent4>
+        <a:accent5>
+          <a:srgbClr val="DAEDEF"/>
+        </a:accent5>
+        <a:accent6>
+          <a:srgbClr val="2D2D8A"/>
+        </a:accent6>
+        <a:hlink>
+          <a:srgbClr val="009999"/>
+        </a:hlink>
+        <a:folHlink>
+          <a:srgbClr val="99CC00"/>
+        </a:folHlink>
+      </a:clrScheme>
+      <a:clrMap bg1="lt1" tx1="dk1" bg2="lt2" tx2="dk2" accent1="accent1" accent2="accent2" accent3="accent3" accent4="accent4" accent5="accent5" accent6="accent6" hlink="hlink" folHlink="folHlink"/>
+    </a:extraClrScheme>
+    <a:extraClrScheme>
+      <a:clrScheme name="Office Theme 2">
+        <a:dk1>
+          <a:srgbClr val="000000"/>
+        </a:dk1>
+        <a:lt1>
+          <a:srgbClr val="FFFFFF"/>
+        </a:lt1>
+        <a:dk2>
+          <a:srgbClr val="000000"/>
+        </a:dk2>
+        <a:lt2>
+          <a:srgbClr val="969696"/>
+        </a:lt2>
+        <a:accent1>
+          <a:srgbClr val="FBDF53"/>
+        </a:accent1>
+        <a:accent2>
+          <a:srgbClr val="FF9966"/>
+        </a:accent2>
+        <a:accent3>
+          <a:srgbClr val="FFFFFF"/>
+        </a:accent3>
+        <a:accent4>
+          <a:srgbClr val="000000"/>
+        </a:accent4>
+        <a:accent5>
+          <a:srgbClr val="FDECB3"/>
+        </a:accent5>
+        <a:accent6>
+          <a:srgbClr val="E78A5C"/>
+        </a:accent6>
+        <a:hlink>
+          <a:srgbClr val="CC3300"/>
+        </a:hlink>
+        <a:folHlink>
+          <a:srgbClr val="996600"/>
+        </a:folHlink>
+      </a:clrScheme>
+      <a:clrMap bg1="lt1" tx1="dk1" bg2="lt2" tx2="dk2" accent1="accent1" accent2="accent2" accent3="accent3" accent4="accent4" accent5="accent5" accent6="accent6" hlink="hlink" folHlink="folHlink"/>
+    </a:extraClrScheme>
+    <a:extraClrScheme>
+      <a:clrScheme name="Office Theme 3">
+        <a:dk1>
+          <a:srgbClr val="000000"/>
+        </a:dk1>
+        <a:lt1>
+          <a:srgbClr val="FFFFFF"/>
+        </a:lt1>
+        <a:dk2>
+          <a:srgbClr val="000000"/>
+        </a:dk2>
+        <a:lt2>
+          <a:srgbClr val="808080"/>
+        </a:lt2>
+        <a:accent1>
+          <a:srgbClr val="99CCFF"/>
+        </a:accent1>
+        <a:accent2>
+          <a:srgbClr val="CCCCFF"/>
+        </a:accent2>
+        <a:accent3>
+          <a:srgbClr val="FFFFFF"/>
+        </a:accent3>
+        <a:accent4>
+          <a:srgbClr val="000000"/>
+        </a:accent4>
+        <a:accent5>
+          <a:srgbClr val="CAE2FF"/>
+        </a:accent5>
+        <a:accent6>
+          <a:srgbClr val="B9B9E7"/>
+        </a:accent6>
+        <a:hlink>
+          <a:srgbClr val="3333CC"/>
+        </a:hlink>
+        <a:folHlink>
+          <a:srgbClr val="AF67FF"/>
+        </a:folHlink>
+      </a:clrScheme>
+      <a:clrMap bg1="lt1" tx1="dk1" bg2="lt2" tx2="dk2" accent1="accent1" accent2="accent2" accent3="accent3" accent4="accent4" accent5="accent5" accent6="accent6" hlink="hlink" folHlink="folHlink"/>
+    </a:extraClrScheme>
+    <a:extraClrScheme>
+      <a:clrScheme name="Office Theme 4">
+        <a:dk1>
+          <a:srgbClr val="000000"/>
+        </a:dk1>
+        <a:lt1>
+          <a:srgbClr val="DEF6F1"/>
+        </a:lt1>
+        <a:dk2>
+          <a:srgbClr val="000000"/>
+        </a:dk2>
+        <a:lt2>
+          <a:srgbClr val="969696"/>
+        </a:lt2>
+        <a:accent1>
+          <a:srgbClr val="FFFFFF"/>
+        </a:accent1>
+        <a:accent2>
+          <a:srgbClr val="8DC6FF"/>
+        </a:accent2>
+        <a:accent3>
+          <a:srgbClr val="ECFAF7"/>
+        </a:accent3>
+        <a:accent4>
+          <a:srgbClr val="000000"/>
+        </a:accent4>
+        <a:accent5>
+          <a:srgbClr val="FFFFFF"/>
+        </a:accent5>
+        <a:accent6>
+          <a:srgbClr val="7FB3E7"/>
+        </a:accent6>
+        <a:hlink>
+          <a:srgbClr val="0066CC"/>
+        </a:hlink>
+        <a:folHlink>
+          <a:srgbClr val="00A800"/>
+        </a:folHlink>
+      </a:clrScheme>
+      <a:clrMap bg1="lt1" tx1="dk1" bg2="lt2" tx2="dk2" accent1="accent1" accent2="accent2" accent3="accent3" accent4="accent4" accent5="accent5" accent6="accent6" hlink="hlink" folHlink="folHlink"/>
+    </a:extraClrScheme>
+    <a:extraClrScheme>
+      <a:clrScheme name="Office Theme 5">
+        <a:dk1>
+          <a:srgbClr val="000000"/>
+        </a:dk1>
+        <a:lt1>
+          <a:srgbClr val="FFFFD9"/>
+        </a:lt1>
+        <a:dk2>
+          <a:srgbClr val="000000"/>
+        </a:dk2>
+        <a:lt2>
+          <a:srgbClr val="777777"/>
+        </a:lt2>
+        <a:accent1>
+          <a:srgbClr val="FFFFF7"/>
+        </a:accent1>
+        <a:accent2>
+          <a:srgbClr val="33CCCC"/>
+        </a:accent2>
+        <a:accent3>
+          <a:srgbClr val="FFFFE9"/>
+        </a:accent3>
+        <a:accent4>
+          <a:srgbClr val="000000"/>
+        </a:accent4>
+        <a:accent5>
+          <a:srgbClr val="FFFFFA"/>
+        </a:accent5>
+        <a:accent6>
+          <a:srgbClr val="2DB9B9"/>
+        </a:accent6>
+        <a:hlink>
+          <a:srgbClr val="FF5050"/>
+        </a:hlink>
+        <a:folHlink>
+          <a:srgbClr val="FF9900"/>
+        </a:folHlink>
+      </a:clrScheme>
+      <a:clrMap bg1="lt1" tx1="dk1" bg2="lt2" tx2="dk2" accent1="accent1" accent2="accent2" accent3="accent3" accent4="accent4" accent5="accent5" accent6="accent6" hlink="hlink" folHlink="folHlink"/>
+    </a:extraClrScheme>
+    <a:extraClrScheme>
+      <a:clrScheme name="Office Theme 6">
+        <a:dk1>
+          <a:srgbClr val="005A58"/>
+        </a:dk1>
+        <a:lt1>
+          <a:srgbClr val="FFFFFF"/>
+        </a:lt1>
+        <a:dk2>
+          <a:srgbClr val="008080"/>
+        </a:dk2>
+        <a:lt2>
+          <a:srgbClr val="FFFF99"/>
+        </a:lt2>
+        <a:accent1>
+          <a:srgbClr val="006462"/>
+        </a:accent1>
+        <a:accent2>
+          <a:srgbClr val="6D6FC7"/>
+        </a:accent2>
+        <a:accent3>
+          <a:srgbClr val="AAC0C0"/>
+        </a:accent3>
+        <a:accent4>
+          <a:srgbClr val="DADADA"/>
+        </a:accent4>
+        <a:accent5>
+          <a:srgbClr val="AAB8B7"/>
+        </a:accent5>
+        <a:accent6>
+          <a:srgbClr val="6264B4"/>
+        </a:accent6>
+        <a:hlink>
+          <a:srgbClr val="00FFFF"/>
+        </a:hlink>
+        <a:folHlink>
+          <a:srgbClr val="00FF00"/>
+        </a:folHlink>
+      </a:clrScheme>
+      <a:clrMap bg1="dk2" tx1="lt1" bg2="dk1" tx2="lt2" accent1="accent1" accent2="accent2" accent3="accent3" accent4="accent4" accent5="accent5" accent6="accent6" hlink="hlink" folHlink="folHlink"/>
+    </a:extraClrScheme>
+    <a:extraClrScheme>
+      <a:clrScheme name="Office Theme 7">
+        <a:dk1>
+          <a:srgbClr val="5C1F00"/>
+        </a:dk1>
+        <a:lt1>
+          <a:srgbClr val="FFFFFF"/>
+        </a:lt1>
+        <a:dk2>
+          <a:srgbClr val="800000"/>
+        </a:dk2>
+        <a:lt2>
+          <a:srgbClr val="DFD293"/>
+        </a:lt2>
+        <a:accent1>
+          <a:srgbClr val="CC3300"/>
+        </a:accent1>
+        <a:accent2>
+          <a:srgbClr val="BE7960"/>
+        </a:accent2>
+        <a:accent3>
+          <a:srgbClr val="C0AAAA"/>
+        </a:accent3>
+        <a:accent4>
+          <a:srgbClr val="DADADA"/>
+        </a:accent4>
+        <a:accent5>
+          <a:srgbClr val="E2ADAA"/>
+        </a:accent5>
+        <a:accent6>
+          <a:srgbClr val="AC6D56"/>
+        </a:accent6>
+        <a:hlink>
+          <a:srgbClr val="FFFF99"/>
+        </a:hlink>
+        <a:folHlink>
+          <a:srgbClr val="D3A219"/>
+        </a:folHlink>
+      </a:clrScheme>
+      <a:clrMap bg1="dk2" tx1="lt1" bg2="dk1" tx2="lt2" accent1="accent1" accent2="accent2" accent3="accent3" accent4="accent4" accent5="accent5" accent6="accent6" hlink="hlink" folHlink="folHlink"/>
+    </a:extraClrScheme>
+    <a:extraClrScheme>
+      <a:clrScheme name="Office Theme 8">
+        <a:dk1>
+          <a:srgbClr val="003366"/>
+        </a:dk1>
+        <a:lt1>
+          <a:srgbClr val="FFFFFF"/>
+        </a:lt1>
+        <a:dk2>
+          <a:srgbClr val="000099"/>
+        </a:dk2>
+        <a:lt2>
+          <a:srgbClr val="CCFFFF"/>
+        </a:lt2>
+        <a:accent1>
+          <a:srgbClr val="3366CC"/>
+        </a:accent1>
+        <a:accent2>
+          <a:srgbClr val="00B000"/>
+        </a:accent2>
+        <a:accent3>
+          <a:srgbClr val="AAAACA"/>
+        </a:accent3>
+        <a:accent4>
+          <a:srgbClr val="DADADA"/>
+        </a:accent4>
+        <a:accent5>
+          <a:srgbClr val="ADB8E2"/>
+        </a:accent5>
+        <a:accent6>
+          <a:srgbClr val="009F00"/>
+        </a:accent6>
+        <a:hlink>
+          <a:srgbClr val="66CCFF"/>
+        </a:hlink>
+        <a:folHlink>
+          <a:srgbClr val="FFE701"/>
+        </a:folHlink>
+      </a:clrScheme>
+      <a:clrMap bg1="dk2" tx1="lt1" bg2="dk1" tx2="lt2" accent1="accent1" accent2="accent2" accent3="accent3" accent4="accent4" accent5="accent5" accent6="accent6" hlink="hlink" folHlink="folHlink"/>
+    </a:extraClrScheme>
+    <a:extraClrScheme>
+      <a:clrScheme name="Office Theme 9">
+        <a:dk1>
+          <a:srgbClr val="336699"/>
+        </a:dk1>
+        <a:lt1>
+          <a:srgbClr val="FFFFFF"/>
+        </a:lt1>
+        <a:dk2>
+          <a:srgbClr val="000000"/>
+        </a:dk2>
+        <a:lt2>
+          <a:srgbClr val="E3EBF1"/>
+        </a:lt2>
+        <a:accent1>
+          <a:srgbClr val="003399"/>
+        </a:accent1>
+        <a:accent2>
+          <a:srgbClr val="468A4B"/>
+        </a:accent2>
+        <a:accent3>
+          <a:srgbClr val="AAAAAA"/>
+        </a:accent3>
+        <a:accent4>
+          <a:srgbClr val="DADADA"/>
+        </a:accent4>
+        <a:accent5>
+          <a:srgbClr val="AAADCA"/>
+        </a:accent5>
+        <a:accent6>
+          <a:srgbClr val="3F7D43"/>
+        </a:accent6>
+        <a:hlink>
+          <a:srgbClr val="66CCFF"/>
+        </a:hlink>
+        <a:folHlink>
+          <a:srgbClr val="F0E500"/>
+        </a:folHlink>
+      </a:clrScheme>
+      <a:clrMap bg1="dk2" tx1="lt1" bg2="dk1" tx2="lt2" accent1="accent1" accent2="accent2" accent3="accent3" accent4="accent4" accent5="accent5" accent6="accent6" hlink="hlink" folHlink="folHlink"/>
+    </a:extraClrScheme>
+    <a:extraClrScheme>
+      <a:clrScheme name="Office Theme 10">
+        <a:dk1>
+          <a:srgbClr val="777777"/>
+        </a:dk1>
+        <a:lt1>
+          <a:srgbClr val="FFFFFF"/>
+        </a:lt1>
+        <a:dk2>
+          <a:srgbClr val="686B5D"/>
+        </a:dk2>
+        <a:lt2>
+          <a:srgbClr val="D1D1CB"/>
+        </a:lt2>
+        <a:accent1>
+          <a:srgbClr val="909082"/>
+        </a:accent1>
+        <a:accent2>
+          <a:srgbClr val="809EA8"/>
+        </a:accent2>
+        <a:accent3>
+          <a:srgbClr val="B9BAB6"/>
+        </a:accent3>
+        <a:accent4>
+          <a:srgbClr val="DADADA"/>
+        </a:accent4>
+        <a:accent5>
+          <a:srgbClr val="C6C6C1"/>
+        </a:accent5>
+        <a:accent6>
+          <a:srgbClr val="738F98"/>
+        </a:accent6>
+        <a:hlink>
+          <a:srgbClr val="FFCC66"/>
+        </a:hlink>
+        <a:folHlink>
+          <a:srgbClr val="E9DCB9"/>
+        </a:folHlink>
+      </a:clrScheme>
+      <a:clrMap bg1="dk2" tx1="lt1" bg2="dk1" tx2="lt2" accent1="accent1" accent2="accent2" accent3="accent3" accent4="accent4" accent5="accent5" accent6="accent6" hlink="hlink" folHlink="folHlink"/>
+    </a:extraClrScheme>
+    <a:extraClrScheme>
+      <a:clrScheme name="Office Theme 11">
+        <a:dk1>
+          <a:srgbClr val="3E3E5C"/>
+        </a:dk1>
+        <a:lt1>
+          <a:srgbClr val="FFFFFF"/>
+        </a:lt1>
+        <a:dk2>
+          <a:srgbClr val="666699"/>
+        </a:dk2>
+        <a:lt2>
+          <a:srgbClr val="FFFFFF"/>
+        </a:lt2>
+        <a:accent1>
+          <a:srgbClr val="60597B"/>
+        </a:accent1>
+        <a:accent2>
+          <a:srgbClr val="6666FF"/>
+        </a:accent2>
+        <a:accent3>
+          <a:srgbClr val="B8B8CA"/>
+        </a:accent3>
+        <a:accent4>
+          <a:srgbClr val="DADADA"/>
+        </a:accent4>
+        <a:accent5>
+          <a:srgbClr val="B6B5BF"/>
+        </a:accent5>
+        <a:accent6>
+          <a:srgbClr val="5C5CE7"/>
+        </a:accent6>
+        <a:hlink>
+          <a:srgbClr val="99CCFF"/>
+        </a:hlink>
+        <a:folHlink>
+          <a:srgbClr val="FFFF99"/>
+        </a:folHlink>
+      </a:clrScheme>
+      <a:clrMap bg1="dk2" tx1="lt1" bg2="dk1" tx2="lt2" accent1="accent1" accent2="accent2" accent3="accent3" accent4="accent4" accent5="accent5" accent6="accent6" hlink="hlink" folHlink="folHlink"/>
+    </a:extraClrScheme>
+    <a:extraClrScheme>
+      <a:clrScheme name="Office Theme 12">
+        <a:dk1>
+          <a:srgbClr val="2D2015"/>
+        </a:dk1>
+        <a:lt1>
+          <a:srgbClr val="FFFFFF"/>
+        </a:lt1>
+        <a:dk2>
+          <a:srgbClr val="523E26"/>
+        </a:dk2>
+        <a:lt2>
+          <a:srgbClr val="DFC08D"/>
+        </a:lt2>
+        <a:accent1>
+          <a:srgbClr val="8C7B70"/>
+        </a:accent1>
+        <a:accent2>
+          <a:srgbClr val="8F5F2F"/>
+        </a:accent2>
+        <a:accent3>
+          <a:srgbClr val="B3AFAC"/>
+        </a:accent3>
+        <a:accent4>
+          <a:srgbClr val="DADADA"/>
+        </a:accent4>
+        <a:accent5>
+          <a:srgbClr val="C5BFBB"/>
+        </a:accent5>
+        <a:accent6>
+          <a:srgbClr val="81552A"/>
+        </a:accent6>
+        <a:hlink>
+          <a:srgbClr val="CCB400"/>
+        </a:hlink>
+        <a:folHlink>
+          <a:srgbClr val="8C9EA0"/>
+        </a:folHlink>
+      </a:clrScheme>
+      <a:clrMap bg1="dk2" tx1="lt1" bg2="dk1" tx2="lt2" accent1="accent1" accent2="accent2" accent3="accent3" accent4="accent4" accent5="accent5" accent6="accent6" hlink="hlink" folHlink="folHlink"/>
+    </a:extraClrScheme>
+  </a:extraClrSchemeLst>
+</a:theme>
+</file>
+
+<file path=ppt/theme/theme2.xml><?xml version="1.0" encoding="utf-8"?>
+<a:theme xmlns:a="http://schemas.openxmlformats.org/drawingml/2006/main" name="Office Theme">
+  <a:themeElements>
+    <a:clrScheme name="">
+      <a:dk1>
+        <a:srgbClr val="000000"/>
+      </a:dk1>
+      <a:lt1>
+        <a:srgbClr val="FFFFFF"/>
+      </a:lt1>
+      <a:dk2>
+        <a:srgbClr val="000000"/>
+      </a:dk2>
+      <a:lt2>
+        <a:srgbClr val="808080"/>
+      </a:lt2>
+      <a:accent1>
+        <a:srgbClr val="BBE0E3"/>
+      </a:accent1>
+      <a:accent2>
+        <a:srgbClr val="333399"/>
+      </a:accent2>
+      <a:accent3>
+        <a:srgbClr val="FFFFFF"/>
+      </a:accent3>
+      <a:accent4>
+        <a:srgbClr val="000000"/>
+      </a:accent4>
+      <a:accent5>
+        <a:srgbClr val="DAEDEF"/>
+      </a:accent5>
+      <a:accent6>
+        <a:srgbClr val="2D2D8A"/>
+      </a:accent6>
+      <a:hlink>
+        <a:srgbClr val="009999"/>
+      </a:hlink>
+      <a:folHlink>
+        <a:srgbClr val="99CC00"/>
+      </a:folHlink>
+    </a:clrScheme>
+    <a:fontScheme name="Office">
+      <a:majorFont>
+        <a:latin typeface="Calibri"/>
+        <a:ea typeface=""/>
+        <a:cs typeface=""/>
+        <a:font script="Jpan" typeface="ＭＳ Ｐゴシック"/>
+        <a:font script="Hang" typeface="맑은 고딕"/>
+        <a:font script="Hans" typeface="宋体"/>
+        <a:font script="Hant" typeface="新細明體"/>
+        <a:font script="Arab" typeface="Times New Roman"/>
+        <a:font script="Hebr" typeface="Times New Roman"/>
+        <a:font script="Thai" typeface="Angsana New"/>
+        <a:font script="Ethi" typeface="Nyala"/>
+        <a:font script="Beng" typeface="Vrinda"/>
+        <a:font script="Gujr" typeface="Shruti"/>
+        <a:font script="Khmr" typeface="MoolBoran"/>
+        <a:font script="Knda" typeface="Tunga"/>
+        <a:font script="Guru" typeface="Raavi"/>
+        <a:font script="Cans" typeface="Euphemia"/>
+        <a:font script="Cher" typeface="Plantagenet Cherokee"/>
+        <a:font script="Yiii" typeface="Microsoft Yi Baiti"/>
+        <a:font script="Tibt" typeface="Microsoft Himalaya"/>
+        <a:font script="Thaa" typeface="MV Boli"/>
+        <a:font script="Deva" typeface="Mangal"/>
+        <a:font script="Telu" typeface="Gautami"/>
+        <a:font script="Taml" typeface="Latha"/>
+        <a:font script="Syrc" typeface="Estrangelo Edessa"/>
+        <a:font script="Orya" typeface="Kalinga"/>
+        <a:font script="Mlym" typeface="Kartika"/>
+        <a:font script="Laoo" typeface="DokChampa"/>
+        <a:font script="Sinh" typeface="Iskoola Pota"/>
+        <a:font script="Mong" typeface="Mongolian Baiti"/>
+        <a:font script="Viet" typeface="Times New Roman"/>
+        <a:font script="Uigh" typeface="Microsoft Uighur"/>
+      </a:majorFont>
+      <a:minorFont>
+        <a:latin typeface="Calibri"/>
+        <a:ea typeface=""/>
+        <a:cs typeface=""/>
+        <a:font script="Jpan" typeface="ＭＳ Ｐゴシック"/>
+        <a:font script="Hang" typeface="맑은 고딕"/>
+        <a:font script="Hans" typeface="宋体"/>
+        <a:font script="Hant" typeface="新細明體"/>
+        <a:font script="Arab" typeface="Arial"/>
+        <a:font script="Hebr" typeface="Arial"/>
+        <a:font script="Thai" typeface="Cordia New"/>
+        <a:font script="Ethi" typeface="Nyala"/>
+        <a:font script="Beng" typeface="Vrinda"/>
+        <a:font script="Gujr" typeface="Shruti"/>
+        <a:font script="Khmr" typeface="DaunPenh"/>
+        <a:font script="Knda" typeface="Tunga"/>
+        <a:font script="Guru" typeface="Raavi"/>
+        <a:font script="Cans" typeface="Euphemia"/>
+        <a:font script="Cher" typeface="Plantagenet Cherokee"/>
+        <a:font script="Yiii" typeface="Microsoft Yi Baiti"/>
+        <a:font script="Tibt" typeface="Microsoft Himalaya"/>
+        <a:font script="Thaa" typeface="MV Boli"/>
+        <a:font script="Deva" typeface="Mangal"/>
+        <a:font script="Telu" typeface="Gautami"/>
+        <a:font script="Taml" typeface="Latha"/>
+        <a:font script="Syrc" typeface="Estrangelo Edessa"/>
+        <a:font script="Orya" typeface="Kalinga"/>
+        <a:font script="Mlym" typeface="Kartika"/>
+        <a:font script="Laoo" typeface="DokChampa"/>
+        <a:font script="Sinh" typeface="Iskoola Pota"/>
+        <a:font script="Mong" typeface="Mongolian Baiti"/>
+        <a:font script="Viet" typeface="Arial"/>
+        <a:font script="Uigh" typeface="Microsoft Uighur"/>
+      </a:minorFont>
+    </a:fontScheme>
+    <a:fmtScheme name="Office">
+      <a:fillStyleLst>
+        <a:solidFill>
+          <a:schemeClr val="phClr"/>
+        </a:solidFill>
+        <a:gradFill rotWithShape="1">
+          <a:gsLst>
+            <a:gs pos="0">
+              <a:schemeClr val="phClr">
+                <a:tint val="50000"/>
+                <a:satMod val="300000"/>
+              </a:schemeClr>
+            </a:gs>
+            <a:gs pos="35000">
+              <a:schemeClr val="phClr">
+                <a:tint val="37000"/>
+                <a:satMod val="300000"/>
+              </a:schemeClr>
+            </a:gs>
+            <a:gs pos="100000">
+              <a:schemeClr val="phClr">
+                <a:tint val="15000"/>
+                <a:satMod val="350000"/>
+              </a:schemeClr>
+            </a:gs>
+          </a:gsLst>
+          <a:lin ang="16200000" scaled="1"/>
+        </a:gradFill>
+        <a:gradFill rotWithShape="1">
+          <a:gsLst>
+            <a:gs pos="0">
+              <a:schemeClr val="phClr">
+                <a:shade val="51000"/>
+                <a:satMod val="130000"/>
+              </a:schemeClr>
+            </a:gs>
+            <a:gs pos="80000">
+              <a:schemeClr val="phClr">
+                <a:shade val="93000"/>
+                <a:satMod val="130000"/>
+              </a:schemeClr>
+            </a:gs>
+            <a:gs pos="100000">
+              <a:schemeClr val="phClr">
+                <a:shade val="94000"/>
+                <a:satMod val="135000"/>
+              </a:schemeClr>
+            </a:gs>
+          </a:gsLst>
+          <a:lin ang="16200000" scaled="0"/>
+        </a:gradFill>
+      </a:fillStyleLst>
+      <a:lnStyleLst>
+        <a:ln w="9525" cap="flat" cmpd="sng" algn="ctr">
+          <a:solidFill>
+            <a:schemeClr val="phClr">
+              <a:shade val="95000"/>
+              <a:satMod val="105000"/>
+            </a:schemeClr>
+          </a:solidFill>
+          <a:prstDash val="solid"/>
+        </a:ln>
+        <a:ln w="25400" cap="flat" cmpd="sng" algn="ctr">
+          <a:solidFill>
+            <a:schemeClr val="phClr"/>
+          </a:solidFill>
+          <a:prstDash val="solid"/>
+        </a:ln>
+        <a:ln w="38100" cap="flat" cmpd="sng" algn="ctr">
+          <a:solidFill>
+            <a:schemeClr val="phClr"/>
+          </a:solidFill>
+          <a:prstDash val="solid"/>
+        </a:ln>
+      </a:lnStyleLst>
+      <a:effectStyleLst>
+        <a:effectStyle>
+          <a:effectLst>
+            <a:outerShdw blurRad="40000" dist="20000" dir="5400000" rotWithShape="0">
+              <a:srgbClr val="000000">
+                <a:alpha val="38000"/>
+              </a:srgbClr>
+            </a:outerShdw>
+          </a:effectLst>
+        </a:effectStyle>
+        <a:effectStyle>
+          <a:effectLst>
+            <a:outerShdw blurRad="40000" dist="23000" dir="5400000" rotWithShape="0">
+              <a:srgbClr val="000000">
+                <a:alpha val="35000"/>
+              </a:srgbClr>
+            </a:outerShdw>
+          </a:effectLst>
+        </a:effectStyle>
+        <a:effectStyle>
+          <a:effectLst>
+            <a:outerShdw blurRad="40000" dist="23000" dir="5400000" rotWithShape="0">
+              <a:srgbClr val="000000">
+                <a:alpha val="35000"/>
+              </a:srgbClr>
+            </a:outerShdw>
+          </a:effectLst>
+          <a:scene3d>
+            <a:camera prst="orthographicFront">
+              <a:rot lat="0" lon="0" rev="0"/>
+            </a:camera>
+            <a:lightRig rig="threePt" dir="t">
+              <a:rot lat="0" lon="0" rev="1200000"/>
+            </a:lightRig>
+          </a:scene3d>
+          <a:sp3d>
+            <a:bevelT w="63500" h="25400"/>
+          </a:sp3d>
+        </a:effectStyle>
+      </a:effectStyleLst>
+      <a:bgFillStyleLst>
+        <a:solidFill>
+          <a:schemeClr val="phClr"/>
+        </a:solidFill>
+        <a:gradFill rotWithShape="1">
+          <a:gsLst>
+            <a:gs pos="0">
+              <a:schemeClr val="phClr">
+                <a:tint val="40000"/>
+                <a:satMod val="350000"/>
+              </a:schemeClr>
+            </a:gs>
+            <a:gs pos="40000">
+              <a:schemeClr val="phClr">
+                <a:tint val="45000"/>
+                <a:shade val="99000"/>
+                <a:satMod val="350000"/>
+              </a:schemeClr>
+            </a:gs>
+            <a:gs pos="100000">
+              <a:schemeClr val="phClr">
+                <a:shade val="20000"/>
+                <a:satMod val="255000"/>
+              </a:schemeClr>
+            </a:gs>
+          </a:gsLst>
+          <a:path path="circle">
+            <a:fillToRect l="50000" t="-80000" r="50000" b="180000"/>
+          </a:path>
+        </a:gradFill>
+        <a:gradFill rotWithShape="1">
+          <a:gsLst>
+            <a:gs pos="0">
+              <a:schemeClr val="phClr">
+                <a:tint val="80000"/>
+                <a:satMod val="300000"/>
+              </a:schemeClr>
+            </a:gs>
+            <a:gs pos="100000">
+              <a:schemeClr val="phClr">
+                <a:shade val="30000"/>
+                <a:satMod val="200000"/>
+              </a:schemeClr>
+            </a:gs>
+          </a:gsLst>
+          <a:path path="circle">
+            <a:fillToRect l="50000" t="50000" r="50000" b="50000"/>
+          </a:path>
+        </a:gradFill>
+      </a:bgFillStyleLst>
+    </a:fmtScheme>
+  </a:themeElements>
+  <a:objectDefaults/>
   <a:extraClrSchemeLst/>
 </a:theme>
 </file>